--- a/exports/pptx/lessons/senior-module-01-what-is-iks/day-06-astronomy.pptx
+++ b/exports/pptx/lessons/senior-module-01-what-is-iks/day-06-astronomy.pptx
@@ -14,9 +14,14 @@
     <p:sldId id="262" r:id="rId8"/>
     <p:sldId id="263" r:id="rId9"/>
     <p:sldId id="264" r:id="rId10"/>
+    <p:sldId id="265" r:id="rId11"/>
+    <p:sldId id="266" r:id="rId12"/>
+    <p:sldId id="267" r:id="rId13"/>
+    <p:sldId id="268" r:id="rId14"/>
+    <p:sldId id="269" r:id="rId15"/>
   </p:sldIdLst>
   <p:notesMasterIdLst>
-    <p:notesMasterId r:id="rId11"/>
+    <p:notesMasterId r:id="rId16"/>
   </p:notesMasterIdLst>
   <p:sldSz cx="9144000" cy="5143500"/>
   <p:notesSz cx="5143500" cy="9144000"/>
@@ -534,6 +539,446 @@
             <a:fld id="{F7021451-1387-4CA6-816F-3879F97B5CBC}" type="slidenum">
               <a:rPr lang="en-US"/>
               <a:t>1</a:t>
+            </a:fld>
+            <a:endParaRPr lang="en-US"/>
+          </a:p>
+        </p:txBody>
+      </p:sp>
+    </p:spTree>
+    <p:extLst>
+      <p:ext uri="{BB962C8B-B14F-4D97-AF65-F5344CB8AC3E}">
+        <p14:creationId xmlns:p14="http://schemas.microsoft.com/office/powerpoint/2010/main" val="1024086991"/>
+      </p:ext>
+    </p:extLst>
+  </p:cSld>
+  <p:clrMapOvr>
+    <a:masterClrMapping/>
+  </p:clrMapOvr>
+</p:notes>
+</file>
+
+<file path=ppt/notesSlides/notesSlide10.xml><?xml version="1.0" encoding="utf-8"?>
+<p:notes xmlns:a="http://schemas.openxmlformats.org/drawingml/2006/main" xmlns:r="http://schemas.openxmlformats.org/officeDocument/2006/relationships" xmlns:p="http://schemas.openxmlformats.org/presentationml/2006/main">
+  <p:cSld>
+    <p:spTree>
+      <p:nvGrpSpPr>
+        <p:cNvPr id="1" name=""/>
+        <p:cNvGrpSpPr/>
+        <p:nvPr/>
+      </p:nvGrpSpPr>
+      <p:grpSpPr>
+        <a:xfrm>
+          <a:off x="0" y="0"/>
+          <a:ext cx="0" cy="0"/>
+          <a:chOff x="0" y="0"/>
+          <a:chExt cx="0" cy="0"/>
+        </a:xfrm>
+      </p:grpSpPr>
+      <p:sp>
+        <p:nvSpPr>
+          <p:cNvPr id="2" name="Slide Image Placeholder 1"/>
+          <p:cNvSpPr>
+            <a:spLocks noGrp="1" noRot="1" noChangeAspect="1"/>
+          </p:cNvSpPr>
+          <p:nvPr>
+            <p:ph type="sldImg"/>
+          </p:nvPr>
+        </p:nvSpPr>
+        <p:spPr/>
+      </p:sp>
+      <p:sp>
+        <p:nvSpPr>
+          <p:cNvPr id="3" name="Notes Placeholder 2"/>
+          <p:cNvSpPr>
+            <a:spLocks noGrp="1"/>
+          </p:cNvSpPr>
+          <p:nvPr>
+            <p:ph type="body" idx="1"/>
+          </p:nvPr>
+        </p:nvSpPr>
+        <p:spPr/>
+        <p:txBody>
+          <a:bodyPr/>
+          <a:lstStyle/>
+          <a:p>
+            <a:r>
+              <a:rPr lang="en-US" dirty="0"/>
+              <a:t/>
+            </a:r>
+            <a:endParaRPr lang="en-US" dirty="0"/>
+          </a:p>
+        </p:txBody>
+      </p:sp>
+      <p:sp>
+        <p:nvSpPr>
+          <p:cNvPr id="4" name="Slide Number Placeholder 3"/>
+          <p:cNvSpPr>
+            <a:spLocks noGrp="1"/>
+          </p:cNvSpPr>
+          <p:nvPr>
+            <p:ph type="sldNum" sz="quarter" idx="10"/>
+          </p:nvPr>
+        </p:nvSpPr>
+        <p:spPr/>
+        <p:txBody>
+          <a:bodyPr/>
+          <a:lstStyle/>
+          <a:p>
+            <a:fld id="{F7021451-1387-4CA6-816F-3879F97B5CBC}" type="slidenum">
+              <a:rPr lang="en-US"/>
+              <a:t>10</a:t>
+            </a:fld>
+            <a:endParaRPr lang="en-US"/>
+          </a:p>
+        </p:txBody>
+      </p:sp>
+    </p:spTree>
+    <p:extLst>
+      <p:ext uri="{BB962C8B-B14F-4D97-AF65-F5344CB8AC3E}">
+        <p14:creationId xmlns:p14="http://schemas.microsoft.com/office/powerpoint/2010/main" val="1024086991"/>
+      </p:ext>
+    </p:extLst>
+  </p:cSld>
+  <p:clrMapOvr>
+    <a:masterClrMapping/>
+  </p:clrMapOvr>
+</p:notes>
+</file>
+
+<file path=ppt/notesSlides/notesSlide11.xml><?xml version="1.0" encoding="utf-8"?>
+<p:notes xmlns:a="http://schemas.openxmlformats.org/drawingml/2006/main" xmlns:r="http://schemas.openxmlformats.org/officeDocument/2006/relationships" xmlns:p="http://schemas.openxmlformats.org/presentationml/2006/main">
+  <p:cSld>
+    <p:spTree>
+      <p:nvGrpSpPr>
+        <p:cNvPr id="1" name=""/>
+        <p:cNvGrpSpPr/>
+        <p:nvPr/>
+      </p:nvGrpSpPr>
+      <p:grpSpPr>
+        <a:xfrm>
+          <a:off x="0" y="0"/>
+          <a:ext cx="0" cy="0"/>
+          <a:chOff x="0" y="0"/>
+          <a:chExt cx="0" cy="0"/>
+        </a:xfrm>
+      </p:grpSpPr>
+      <p:sp>
+        <p:nvSpPr>
+          <p:cNvPr id="2" name="Slide Image Placeholder 1"/>
+          <p:cNvSpPr>
+            <a:spLocks noGrp="1" noRot="1" noChangeAspect="1"/>
+          </p:cNvSpPr>
+          <p:nvPr>
+            <p:ph type="sldImg"/>
+          </p:nvPr>
+        </p:nvSpPr>
+        <p:spPr/>
+      </p:sp>
+      <p:sp>
+        <p:nvSpPr>
+          <p:cNvPr id="3" name="Notes Placeholder 2"/>
+          <p:cNvSpPr>
+            <a:spLocks noGrp="1"/>
+          </p:cNvSpPr>
+          <p:nvPr>
+            <p:ph type="body" idx="1"/>
+          </p:nvPr>
+        </p:nvSpPr>
+        <p:spPr/>
+        <p:txBody>
+          <a:bodyPr/>
+          <a:lstStyle/>
+          <a:p>
+            <a:r>
+              <a:rPr lang="en-US" dirty="0"/>
+              <a:t/>
+            </a:r>
+            <a:endParaRPr lang="en-US" dirty="0"/>
+          </a:p>
+        </p:txBody>
+      </p:sp>
+      <p:sp>
+        <p:nvSpPr>
+          <p:cNvPr id="4" name="Slide Number Placeholder 3"/>
+          <p:cNvSpPr>
+            <a:spLocks noGrp="1"/>
+          </p:cNvSpPr>
+          <p:nvPr>
+            <p:ph type="sldNum" sz="quarter" idx="10"/>
+          </p:nvPr>
+        </p:nvSpPr>
+        <p:spPr/>
+        <p:txBody>
+          <a:bodyPr/>
+          <a:lstStyle/>
+          <a:p>
+            <a:fld id="{F7021451-1387-4CA6-816F-3879F97B5CBC}" type="slidenum">
+              <a:rPr lang="en-US"/>
+              <a:t>11</a:t>
+            </a:fld>
+            <a:endParaRPr lang="en-US"/>
+          </a:p>
+        </p:txBody>
+      </p:sp>
+    </p:spTree>
+    <p:extLst>
+      <p:ext uri="{BB962C8B-B14F-4D97-AF65-F5344CB8AC3E}">
+        <p14:creationId xmlns:p14="http://schemas.microsoft.com/office/powerpoint/2010/main" val="1024086991"/>
+      </p:ext>
+    </p:extLst>
+  </p:cSld>
+  <p:clrMapOvr>
+    <a:masterClrMapping/>
+  </p:clrMapOvr>
+</p:notes>
+</file>
+
+<file path=ppt/notesSlides/notesSlide12.xml><?xml version="1.0" encoding="utf-8"?>
+<p:notes xmlns:a="http://schemas.openxmlformats.org/drawingml/2006/main" xmlns:r="http://schemas.openxmlformats.org/officeDocument/2006/relationships" xmlns:p="http://schemas.openxmlformats.org/presentationml/2006/main">
+  <p:cSld>
+    <p:spTree>
+      <p:nvGrpSpPr>
+        <p:cNvPr id="1" name=""/>
+        <p:cNvGrpSpPr/>
+        <p:nvPr/>
+      </p:nvGrpSpPr>
+      <p:grpSpPr>
+        <a:xfrm>
+          <a:off x="0" y="0"/>
+          <a:ext cx="0" cy="0"/>
+          <a:chOff x="0" y="0"/>
+          <a:chExt cx="0" cy="0"/>
+        </a:xfrm>
+      </p:grpSpPr>
+      <p:sp>
+        <p:nvSpPr>
+          <p:cNvPr id="2" name="Slide Image Placeholder 1"/>
+          <p:cNvSpPr>
+            <a:spLocks noGrp="1" noRot="1" noChangeAspect="1"/>
+          </p:cNvSpPr>
+          <p:nvPr>
+            <p:ph type="sldImg"/>
+          </p:nvPr>
+        </p:nvSpPr>
+        <p:spPr/>
+      </p:sp>
+      <p:sp>
+        <p:nvSpPr>
+          <p:cNvPr id="3" name="Notes Placeholder 2"/>
+          <p:cNvSpPr>
+            <a:spLocks noGrp="1"/>
+          </p:cNvSpPr>
+          <p:nvPr>
+            <p:ph type="body" idx="1"/>
+          </p:nvPr>
+        </p:nvSpPr>
+        <p:spPr/>
+        <p:txBody>
+          <a:bodyPr/>
+          <a:lstStyle/>
+          <a:p>
+            <a:r>
+              <a:rPr lang="en-US" dirty="0"/>
+              <a:t/>
+            </a:r>
+            <a:endParaRPr lang="en-US" dirty="0"/>
+          </a:p>
+        </p:txBody>
+      </p:sp>
+      <p:sp>
+        <p:nvSpPr>
+          <p:cNvPr id="4" name="Slide Number Placeholder 3"/>
+          <p:cNvSpPr>
+            <a:spLocks noGrp="1"/>
+          </p:cNvSpPr>
+          <p:nvPr>
+            <p:ph type="sldNum" sz="quarter" idx="10"/>
+          </p:nvPr>
+        </p:nvSpPr>
+        <p:spPr/>
+        <p:txBody>
+          <a:bodyPr/>
+          <a:lstStyle/>
+          <a:p>
+            <a:fld id="{F7021451-1387-4CA6-816F-3879F97B5CBC}" type="slidenum">
+              <a:rPr lang="en-US"/>
+              <a:t>12</a:t>
+            </a:fld>
+            <a:endParaRPr lang="en-US"/>
+          </a:p>
+        </p:txBody>
+      </p:sp>
+    </p:spTree>
+    <p:extLst>
+      <p:ext uri="{BB962C8B-B14F-4D97-AF65-F5344CB8AC3E}">
+        <p14:creationId xmlns:p14="http://schemas.microsoft.com/office/powerpoint/2010/main" val="1024086991"/>
+      </p:ext>
+    </p:extLst>
+  </p:cSld>
+  <p:clrMapOvr>
+    <a:masterClrMapping/>
+  </p:clrMapOvr>
+</p:notes>
+</file>
+
+<file path=ppt/notesSlides/notesSlide13.xml><?xml version="1.0" encoding="utf-8"?>
+<p:notes xmlns:a="http://schemas.openxmlformats.org/drawingml/2006/main" xmlns:r="http://schemas.openxmlformats.org/officeDocument/2006/relationships" xmlns:p="http://schemas.openxmlformats.org/presentationml/2006/main">
+  <p:cSld>
+    <p:spTree>
+      <p:nvGrpSpPr>
+        <p:cNvPr id="1" name=""/>
+        <p:cNvGrpSpPr/>
+        <p:nvPr/>
+      </p:nvGrpSpPr>
+      <p:grpSpPr>
+        <a:xfrm>
+          <a:off x="0" y="0"/>
+          <a:ext cx="0" cy="0"/>
+          <a:chOff x="0" y="0"/>
+          <a:chExt cx="0" cy="0"/>
+        </a:xfrm>
+      </p:grpSpPr>
+      <p:sp>
+        <p:nvSpPr>
+          <p:cNvPr id="2" name="Slide Image Placeholder 1"/>
+          <p:cNvSpPr>
+            <a:spLocks noGrp="1" noRot="1" noChangeAspect="1"/>
+          </p:cNvSpPr>
+          <p:nvPr>
+            <p:ph type="sldImg"/>
+          </p:nvPr>
+        </p:nvSpPr>
+        <p:spPr/>
+      </p:sp>
+      <p:sp>
+        <p:nvSpPr>
+          <p:cNvPr id="3" name="Notes Placeholder 2"/>
+          <p:cNvSpPr>
+            <a:spLocks noGrp="1"/>
+          </p:cNvSpPr>
+          <p:nvPr>
+            <p:ph type="body" idx="1"/>
+          </p:nvPr>
+        </p:nvSpPr>
+        <p:spPr/>
+        <p:txBody>
+          <a:bodyPr/>
+          <a:lstStyle/>
+          <a:p>
+            <a:r>
+              <a:rPr lang="en-US" dirty="0"/>
+              <a:t/>
+            </a:r>
+            <a:endParaRPr lang="en-US" dirty="0"/>
+          </a:p>
+        </p:txBody>
+      </p:sp>
+      <p:sp>
+        <p:nvSpPr>
+          <p:cNvPr id="4" name="Slide Number Placeholder 3"/>
+          <p:cNvSpPr>
+            <a:spLocks noGrp="1"/>
+          </p:cNvSpPr>
+          <p:nvPr>
+            <p:ph type="sldNum" sz="quarter" idx="10"/>
+          </p:nvPr>
+        </p:nvSpPr>
+        <p:spPr/>
+        <p:txBody>
+          <a:bodyPr/>
+          <a:lstStyle/>
+          <a:p>
+            <a:fld id="{F7021451-1387-4CA6-816F-3879F97B5CBC}" type="slidenum">
+              <a:rPr lang="en-US"/>
+              <a:t>13</a:t>
+            </a:fld>
+            <a:endParaRPr lang="en-US"/>
+          </a:p>
+        </p:txBody>
+      </p:sp>
+    </p:spTree>
+    <p:extLst>
+      <p:ext uri="{BB962C8B-B14F-4D97-AF65-F5344CB8AC3E}">
+        <p14:creationId xmlns:p14="http://schemas.microsoft.com/office/powerpoint/2010/main" val="1024086991"/>
+      </p:ext>
+    </p:extLst>
+  </p:cSld>
+  <p:clrMapOvr>
+    <a:masterClrMapping/>
+  </p:clrMapOvr>
+</p:notes>
+</file>
+
+<file path=ppt/notesSlides/notesSlide14.xml><?xml version="1.0" encoding="utf-8"?>
+<p:notes xmlns:a="http://schemas.openxmlformats.org/drawingml/2006/main" xmlns:r="http://schemas.openxmlformats.org/officeDocument/2006/relationships" xmlns:p="http://schemas.openxmlformats.org/presentationml/2006/main">
+  <p:cSld>
+    <p:spTree>
+      <p:nvGrpSpPr>
+        <p:cNvPr id="1" name=""/>
+        <p:cNvGrpSpPr/>
+        <p:nvPr/>
+      </p:nvGrpSpPr>
+      <p:grpSpPr>
+        <a:xfrm>
+          <a:off x="0" y="0"/>
+          <a:ext cx="0" cy="0"/>
+          <a:chOff x="0" y="0"/>
+          <a:chExt cx="0" cy="0"/>
+        </a:xfrm>
+      </p:grpSpPr>
+      <p:sp>
+        <p:nvSpPr>
+          <p:cNvPr id="2" name="Slide Image Placeholder 1"/>
+          <p:cNvSpPr>
+            <a:spLocks noGrp="1" noRot="1" noChangeAspect="1"/>
+          </p:cNvSpPr>
+          <p:nvPr>
+            <p:ph type="sldImg"/>
+          </p:nvPr>
+        </p:nvSpPr>
+        <p:spPr/>
+      </p:sp>
+      <p:sp>
+        <p:nvSpPr>
+          <p:cNvPr id="3" name="Notes Placeholder 2"/>
+          <p:cNvSpPr>
+            <a:spLocks noGrp="1"/>
+          </p:cNvSpPr>
+          <p:nvPr>
+            <p:ph type="body" idx="1"/>
+          </p:nvPr>
+        </p:nvSpPr>
+        <p:spPr/>
+        <p:txBody>
+          <a:bodyPr/>
+          <a:lstStyle/>
+          <a:p>
+            <a:r>
+              <a:rPr lang="en-US" dirty="0"/>
+              <a:t/>
+            </a:r>
+            <a:endParaRPr lang="en-US" dirty="0"/>
+          </a:p>
+        </p:txBody>
+      </p:sp>
+      <p:sp>
+        <p:nvSpPr>
+          <p:cNvPr id="4" name="Slide Number Placeholder 3"/>
+          <p:cNvSpPr>
+            <a:spLocks noGrp="1"/>
+          </p:cNvSpPr>
+          <p:nvPr>
+            <p:ph type="sldNum" sz="quarter" idx="10"/>
+          </p:nvPr>
+        </p:nvSpPr>
+        <p:spPr/>
+        <p:txBody>
+          <a:bodyPr/>
+          <a:lstStyle/>
+          <a:p>
+            <a:fld id="{F7021451-1387-4CA6-816F-3879F97B5CBC}" type="slidenum">
+              <a:rPr lang="en-US"/>
+              <a:t>14</a:t>
             </a:fld>
             <a:endParaRPr lang="en-US"/>
           </a:p>
@@ -1787,7 +2232,117 @@
         </p:nvSpPr>
         <p:spPr>
           <a:xfrm>
-            <a:off x="406301" y="1223963"/>
+            <a:off x="406301" y="4434929"/>
+            <a:ext cx="8498026" cy="213271"/>
+          </a:xfrm>
+          <a:prstGeom prst="rect">
+            <a:avLst/>
+          </a:prstGeom>
+          <a:noFill/>
+          <a:ln/>
+        </p:spPr>
+        <p:txBody>
+          <a:bodyPr wrap="square" lIns="0" tIns="0" rIns="0" bIns="0" rtlCol="0" anchor="t"/>
+          <a:lstStyle/>
+          <a:p>
+            <a:pPr algn="l" indent="0" marL="0">
+              <a:lnSpc>
+                <a:spcPts val="1680"/>
+              </a:lnSpc>
+              <a:spcBef>
+                <a:spcPts val="300"/>
+              </a:spcBef>
+              <a:spcAft>
+                <a:spcPts val="300"/>
+              </a:spcAft>
+              <a:buNone/>
+            </a:pPr>
+            <a:r>
+              <a:rPr lang="en-US" sz="1200" dirty="0">
+                <a:solidFill>
+                  <a:srgbClr val="1A1A1A"/>
+                </a:solidFill>
+                <a:latin typeface="Georgia" pitchFamily="34" charset="0"/>
+                <a:ea typeface="Georgia" pitchFamily="34" charset="-122"/>
+                <a:cs typeface="Georgia" pitchFamily="34" charset="-120"/>
+              </a:rPr>
+              <a:t>Senior ·  · IKS Curriculum</a:t>
+            </a:r>
+            <a:endParaRPr lang="en-US" sz="1200" dirty="0"/>
+          </a:p>
+        </p:txBody>
+      </p:sp>
+    </p:spTree>
+  </p:cSld>
+  <p:clrMapOvr>
+    <a:masterClrMapping/>
+  </p:clrMapOvr>
+</p:sld>
+</file>
+
+<file path=ppt/slides/slide10.xml><?xml version="1.0" encoding="utf-8"?>
+<p:sld xmlns:a="http://schemas.openxmlformats.org/drawingml/2006/main" xmlns:r="http://schemas.openxmlformats.org/officeDocument/2006/relationships" xmlns:p="http://schemas.openxmlformats.org/presentationml/2006/main">
+  <p:cSld name="Slide 10">
+    <p:bg>
+      <p:bgPr>
+        <a:solidFill>
+          <a:srgbClr val="FAF7F2"/>
+        </a:solidFill>
+      </p:bgPr>
+    </p:bg>
+    <p:spTree>
+      <p:nvGrpSpPr>
+        <p:cNvPr id="1" name=""/>
+        <p:cNvGrpSpPr/>
+        <p:nvPr/>
+      </p:nvGrpSpPr>
+      <p:grpSpPr>
+        <a:xfrm>
+          <a:off x="0" y="0"/>
+          <a:ext cx="0" cy="0"/>
+          <a:chOff x="0" y="0"/>
+          <a:chExt cx="0" cy="0"/>
+        </a:xfrm>
+      </p:grpSpPr>
+      <p:sp>
+        <p:nvSpPr>
+          <p:cNvPr id="2" name="Text 0"/>
+          <p:cNvSpPr/>
+          <p:nvPr/>
+        </p:nvSpPr>
+        <p:spPr>
+          <a:xfrm>
+            <a:off x="0" y="0"/>
+            <a:ext cx="9144000" cy="101501"/>
+          </a:xfrm>
+          <a:prstGeom prst="rect">
+            <a:avLst/>
+          </a:prstGeom>
+          <a:solidFill>
+            <a:srgbClr val="5D1D2E"/>
+          </a:solidFill>
+          <a:ln/>
+        </p:spPr>
+        <p:txBody>
+          <a:bodyPr wrap="square" rtlCol="0" anchor="ctr"/>
+          <a:lstStyle/>
+          <a:p>
+            <a:pPr indent="0" marL="0">
+              <a:buNone/>
+            </a:pPr>
+            <a:endParaRPr lang="en-US" dirty="0"/>
+          </a:p>
+        </p:txBody>
+      </p:sp>
+      <p:sp>
+        <p:nvSpPr>
+          <p:cNvPr id="3" name="Text 1"/>
+          <p:cNvSpPr/>
+          <p:nvPr/>
+        </p:nvSpPr>
+        <p:spPr>
+          <a:xfrm>
+            <a:off x="406301" y="457051"/>
             <a:ext cx="8498026" cy="274290"/>
           </a:xfrm>
           <a:prstGeom prst="rect">
@@ -1821,7 +2376,7 @@
                 <a:ea typeface="Times New Roman" pitchFamily="34" charset="-122"/>
                 <a:cs typeface="Times New Roman" pitchFamily="34" charset="-120"/>
               </a:rPr>
-              <a:t>Learning objective</a:t>
+              <a:t>Discussion (10 min)</a:t>
             </a:r>
             <a:endParaRPr lang="en-US" sz="1800" dirty="0"/>
           </a:p>
@@ -1829,14 +2384,14 @@
       </p:sp>
       <p:sp>
         <p:nvSpPr>
-          <p:cNvPr id="6" name="Text 4"/>
+          <p:cNvPr id="4" name="Text 2"/>
           <p:cNvSpPr/>
           <p:nvPr/>
         </p:nvSpPr>
         <p:spPr>
           <a:xfrm>
-            <a:off x="406301" y="1637854"/>
-            <a:ext cx="8498026" cy="426541"/>
+            <a:off x="634901" y="883593"/>
+            <a:ext cx="8102798" cy="731341"/>
           </a:xfrm>
           <a:prstGeom prst="rect">
             <a:avLst/>
@@ -1848,8 +2403,118 @@
           <a:bodyPr wrap="square" lIns="0" tIns="0" rIns="0" bIns="0" rtlCol="0" anchor="t"/>
           <a:lstStyle/>
           <a:p>
+            <a:pPr algn="l" marL="342900" indent="-342900">
+              <a:lnSpc>
+                <a:spcPts val="1620"/>
+              </a:lnSpc>
+              <a:spcAft>
+                <a:spcPts val="300"/>
+              </a:spcAft>
+              <a:buSzPct val="100000"/>
+              <a:buChar char="•"/>
+            </a:pPr>
+            <a:r>
+              <a:rPr lang="en-US" sz="1200" i="1" dirty="0">
+                <a:solidFill>
+                  <a:srgbClr val="1A1A1A"/>
+                </a:solidFill>
+                <a:latin typeface="Georgia" pitchFamily="34" charset="0"/>
+                <a:ea typeface="Georgia" pitchFamily="34" charset="-122"/>
+                <a:cs typeface="Georgia" pitchFamily="34" charset="-120"/>
+              </a:rPr>
+              <a:t>"Does the Yavana exchange weaken the case for celebrating Indian astronomical achievements?"</a:t>
+            </a:r>
+            <a:endParaRPr lang="en-US" sz="1200" dirty="0"/>
+          </a:p>
+          <a:p>
+            <a:pPr algn="l" marL="342900" indent="-342900">
+              <a:lnSpc>
+                <a:spcPts val="1620"/>
+              </a:lnSpc>
+              <a:spcAft>
+                <a:spcPts val="300"/>
+              </a:spcAft>
+              <a:buSzPct val="100000"/>
+              <a:buChar char="•"/>
+            </a:pPr>
+            <a:r>
+              <a:rPr lang="en-US" sz="1200" dirty="0">
+                <a:solidFill>
+                  <a:srgbClr val="1A1A1A"/>
+                </a:solidFill>
+                <a:latin typeface="Georgia" pitchFamily="34" charset="0"/>
+                <a:ea typeface="Georgia" pitchFamily="34" charset="-122"/>
+                <a:cs typeface="Georgia" pitchFamily="34" charset="-120"/>
+              </a:rPr>
+              <a:t>The honest answer: no. </a:t>
+            </a:r>
             <a:pPr algn="l" indent="0" marL="0">
               <a:lnSpc>
+                <a:spcPts val="1620"/>
+              </a:lnSpc>
+              <a:spcAft>
+                <a:spcPts val="300"/>
+              </a:spcAft>
+              <a:buNone/>
+            </a:pPr>
+            <a:r>
+              <a:rPr lang="en-US" sz="1200" i="1" dirty="0">
+                <a:solidFill>
+                  <a:srgbClr val="1A1A1A"/>
+                </a:solidFill>
+                <a:latin typeface="Georgia" pitchFamily="34" charset="0"/>
+                <a:ea typeface="Georgia" pitchFamily="34" charset="-122"/>
+                <a:cs typeface="Georgia" pitchFamily="34" charset="-120"/>
+              </a:rPr>
+              <a:t>Synthesis</a:t>
+            </a:r>
+            <a:pPr algn="l" indent="0" marL="0">
+              <a:lnSpc>
+                <a:spcPts val="1620"/>
+              </a:lnSpc>
+              <a:spcAft>
+                <a:spcPts val="300"/>
+              </a:spcAft>
+              <a:buNone/>
+            </a:pPr>
+            <a:r>
+              <a:rPr lang="en-US" sz="1200" dirty="0">
+                <a:solidFill>
+                  <a:srgbClr val="1A1A1A"/>
+                </a:solidFill>
+                <a:latin typeface="Georgia" pitchFamily="34" charset="0"/>
+                <a:ea typeface="Georgia" pitchFamily="34" charset="-122"/>
+                <a:cs typeface="Georgia" pitchFamily="34" charset="-120"/>
+              </a:rPr>
+              <a:t> is also an achievement. Indian astronomers absorbed Greek methods AND developed their own (e.g. sine instead of chord, Hindu numerals).</a:t>
+            </a:r>
+            <a:endParaRPr lang="en-US" sz="1200" dirty="0"/>
+          </a:p>
+        </p:txBody>
+      </p:sp>
+      <p:sp>
+        <p:nvSpPr>
+          <p:cNvPr id="5" name="Text 3"/>
+          <p:cNvSpPr/>
+          <p:nvPr/>
+        </p:nvSpPr>
+        <p:spPr>
+          <a:xfrm>
+            <a:off x="406301" y="4434929"/>
+            <a:ext cx="8498026" cy="213271"/>
+          </a:xfrm>
+          <a:prstGeom prst="rect">
+            <a:avLst/>
+          </a:prstGeom>
+          <a:noFill/>
+          <a:ln/>
+        </p:spPr>
+        <p:txBody>
+          <a:bodyPr wrap="square" lIns="0" tIns="0" rIns="0" bIns="0" rtlCol="0" anchor="t"/>
+          <a:lstStyle/>
+          <a:p>
+            <a:pPr algn="l" indent="0" marL="0">
+              <a:lnSpc>
                 <a:spcPts val="1680"/>
               </a:lnSpc>
               <a:spcBef>
@@ -1869,15 +2534,1035 @@
                 <a:ea typeface="Georgia" pitchFamily="34" charset="-122"/>
                 <a:cs typeface="Georgia" pitchFamily="34" charset="-120"/>
               </a:rPr>
-              <a:t>Students articulate three specific Indian astronomical achievements AND the Greek-Indian intellectual exchange that complicates the "purely Indian" framing.</a:t>
+              <a:t>Senior ·  · IKS Curriculum</a:t>
             </a:r>
             <a:endParaRPr lang="en-US" sz="1200" dirty="0"/>
           </a:p>
         </p:txBody>
       </p:sp>
-      <p:sp>
-        <p:nvSpPr>
-          <p:cNvPr id="7" name="Text 5"/>
+    </p:spTree>
+  </p:cSld>
+  <p:clrMapOvr>
+    <a:masterClrMapping/>
+  </p:clrMapOvr>
+</p:sld>
+</file>
+
+<file path=ppt/slides/slide11.xml><?xml version="1.0" encoding="utf-8"?>
+<p:sld xmlns:a="http://schemas.openxmlformats.org/drawingml/2006/main" xmlns:r="http://schemas.openxmlformats.org/officeDocument/2006/relationships" xmlns:p="http://schemas.openxmlformats.org/presentationml/2006/main">
+  <p:cSld name="Slide 11">
+    <p:bg>
+      <p:bgPr>
+        <a:solidFill>
+          <a:srgbClr val="FAF7F2"/>
+        </a:solidFill>
+      </p:bgPr>
+    </p:bg>
+    <p:spTree>
+      <p:nvGrpSpPr>
+        <p:cNvPr id="1" name=""/>
+        <p:cNvGrpSpPr/>
+        <p:nvPr/>
+      </p:nvGrpSpPr>
+      <p:grpSpPr>
+        <a:xfrm>
+          <a:off x="0" y="0"/>
+          <a:ext cx="0" cy="0"/>
+          <a:chOff x="0" y="0"/>
+          <a:chExt cx="0" cy="0"/>
+        </a:xfrm>
+      </p:grpSpPr>
+      <p:sp>
+        <p:nvSpPr>
+          <p:cNvPr id="2" name="Text 0"/>
+          <p:cNvSpPr/>
+          <p:nvPr/>
+        </p:nvSpPr>
+        <p:spPr>
+          <a:xfrm>
+            <a:off x="0" y="0"/>
+            <a:ext cx="9144000" cy="101501"/>
+          </a:xfrm>
+          <a:prstGeom prst="rect">
+            <a:avLst/>
+          </a:prstGeom>
+          <a:solidFill>
+            <a:srgbClr val="5D1D2E"/>
+          </a:solidFill>
+          <a:ln/>
+        </p:spPr>
+        <p:txBody>
+          <a:bodyPr wrap="square" rtlCol="0" anchor="ctr"/>
+          <a:lstStyle/>
+          <a:p>
+            <a:pPr indent="0" marL="0">
+              <a:buNone/>
+            </a:pPr>
+            <a:endParaRPr lang="en-US" dirty="0"/>
+          </a:p>
+        </p:txBody>
+      </p:sp>
+      <p:sp>
+        <p:nvSpPr>
+          <p:cNvPr id="3" name="Text 1"/>
+          <p:cNvSpPr/>
+          <p:nvPr/>
+        </p:nvSpPr>
+        <p:spPr>
+          <a:xfrm>
+            <a:off x="406301" y="457051"/>
+            <a:ext cx="8498026" cy="274290"/>
+          </a:xfrm>
+          <a:prstGeom prst="rect">
+            <a:avLst/>
+          </a:prstGeom>
+          <a:noFill/>
+          <a:ln/>
+        </p:spPr>
+        <p:txBody>
+          <a:bodyPr wrap="square" lIns="0" tIns="0" rIns="0" bIns="0" rtlCol="0" anchor="t"/>
+          <a:lstStyle/>
+          <a:p>
+            <a:pPr algn="l" indent="0" marL="0">
+              <a:lnSpc>
+                <a:spcPts val="2160"/>
+              </a:lnSpc>
+              <a:spcBef>
+                <a:spcPts val="600"/>
+              </a:spcBef>
+              <a:spcAft>
+                <a:spcPts val="800"/>
+              </a:spcAft>
+              <a:buNone/>
+            </a:pPr>
+            <a:r>
+              <a:rPr lang="en-US" sz="1800" b="1" dirty="0">
+                <a:solidFill>
+                  <a:srgbClr val="997929"/>
+                </a:solidFill>
+                <a:latin typeface="Times New Roman" pitchFamily="34" charset="0"/>
+                <a:ea typeface="Times New Roman" pitchFamily="34" charset="-122"/>
+                <a:cs typeface="Times New Roman" pitchFamily="34" charset="-120"/>
+              </a:rPr>
+              <a:t>Wrap-up (5 min)</a:t>
+            </a:r>
+            <a:endParaRPr lang="en-US" sz="1800" dirty="0"/>
+          </a:p>
+        </p:txBody>
+      </p:sp>
+      <p:sp>
+        <p:nvSpPr>
+          <p:cNvPr id="4" name="Text 2"/>
+          <p:cNvSpPr/>
+          <p:nvPr/>
+        </p:nvSpPr>
+        <p:spPr>
+          <a:xfrm>
+            <a:off x="634901" y="883593"/>
+            <a:ext cx="8102798" cy="281880"/>
+          </a:xfrm>
+          <a:prstGeom prst="rect">
+            <a:avLst/>
+          </a:prstGeom>
+          <a:noFill/>
+          <a:ln/>
+        </p:spPr>
+        <p:txBody>
+          <a:bodyPr wrap="square" lIns="0" tIns="0" rIns="0" bIns="0" rtlCol="0" anchor="t"/>
+          <a:lstStyle/>
+          <a:p>
+            <a:pPr algn="l" marL="342900" indent="-342900">
+              <a:lnSpc>
+                <a:spcPts val="1620"/>
+              </a:lnSpc>
+              <a:spcAft>
+                <a:spcPts val="300"/>
+              </a:spcAft>
+              <a:buSzPct val="100000"/>
+              <a:buChar char="•"/>
+            </a:pPr>
+            <a:r>
+              <a:rPr lang="en-US" sz="1200" dirty="0">
+                <a:solidFill>
+                  <a:srgbClr val="1A1A1A"/>
+                </a:solidFill>
+                <a:latin typeface="Georgia" pitchFamily="34" charset="0"/>
+                <a:ea typeface="Georgia" pitchFamily="34" charset="-122"/>
+                <a:cs typeface="Georgia" pitchFamily="34" charset="-120"/>
+              </a:rPr>
+              <a:t>Preview Day 7: </a:t>
+            </a:r>
+            <a:pPr algn="l" indent="0" marL="0">
+              <a:lnSpc>
+                <a:spcPts val="1620"/>
+              </a:lnSpc>
+              <a:spcAft>
+                <a:spcPts val="300"/>
+              </a:spcAft>
+              <a:buNone/>
+            </a:pPr>
+            <a:r>
+              <a:rPr lang="en-US" sz="1200" i="1" dirty="0">
+                <a:solidFill>
+                  <a:srgbClr val="1A1A1A"/>
+                </a:solidFill>
+                <a:latin typeface="Georgia" pitchFamily="34" charset="0"/>
+                <a:ea typeface="Georgia" pitchFamily="34" charset="-122"/>
+                <a:cs typeface="Georgia" pitchFamily="34" charset="-120"/>
+              </a:rPr>
+              <a:t>"Tomorrow — the contemporary policy debate. NEP §4.6."</a:t>
+            </a:r>
+            <a:endParaRPr lang="en-US" sz="1200" dirty="0"/>
+          </a:p>
+        </p:txBody>
+      </p:sp>
+      <p:sp>
+        <p:nvSpPr>
+          <p:cNvPr id="5" name="Text 3"/>
+          <p:cNvSpPr/>
+          <p:nvPr/>
+        </p:nvSpPr>
+        <p:spPr>
+          <a:xfrm>
+            <a:off x="406301" y="4434929"/>
+            <a:ext cx="8498026" cy="213271"/>
+          </a:xfrm>
+          <a:prstGeom prst="rect">
+            <a:avLst/>
+          </a:prstGeom>
+          <a:noFill/>
+          <a:ln/>
+        </p:spPr>
+        <p:txBody>
+          <a:bodyPr wrap="square" lIns="0" tIns="0" rIns="0" bIns="0" rtlCol="0" anchor="t"/>
+          <a:lstStyle/>
+          <a:p>
+            <a:pPr algn="l" indent="0" marL="0">
+              <a:lnSpc>
+                <a:spcPts val="1680"/>
+              </a:lnSpc>
+              <a:spcBef>
+                <a:spcPts val="300"/>
+              </a:spcBef>
+              <a:spcAft>
+                <a:spcPts val="300"/>
+              </a:spcAft>
+              <a:buNone/>
+            </a:pPr>
+            <a:r>
+              <a:rPr lang="en-US" sz="1200" dirty="0">
+                <a:solidFill>
+                  <a:srgbClr val="1A1A1A"/>
+                </a:solidFill>
+                <a:latin typeface="Georgia" pitchFamily="34" charset="0"/>
+                <a:ea typeface="Georgia" pitchFamily="34" charset="-122"/>
+                <a:cs typeface="Georgia" pitchFamily="34" charset="-120"/>
+              </a:rPr>
+              <a:t>Senior ·  · IKS Curriculum</a:t>
+            </a:r>
+            <a:endParaRPr lang="en-US" sz="1200" dirty="0"/>
+          </a:p>
+        </p:txBody>
+      </p:sp>
+    </p:spTree>
+  </p:cSld>
+  <p:clrMapOvr>
+    <a:masterClrMapping/>
+  </p:clrMapOvr>
+</p:sld>
+</file>
+
+<file path=ppt/slides/slide12.xml><?xml version="1.0" encoding="utf-8"?>
+<p:sld xmlns:a="http://schemas.openxmlformats.org/drawingml/2006/main" xmlns:r="http://schemas.openxmlformats.org/officeDocument/2006/relationships" xmlns:p="http://schemas.openxmlformats.org/presentationml/2006/main">
+  <p:cSld name="Slide 12">
+    <p:bg>
+      <p:bgPr>
+        <a:solidFill>
+          <a:srgbClr val="FAF7F2"/>
+        </a:solidFill>
+      </p:bgPr>
+    </p:bg>
+    <p:spTree>
+      <p:nvGrpSpPr>
+        <p:cNvPr id="1" name=""/>
+        <p:cNvGrpSpPr/>
+        <p:nvPr/>
+      </p:nvGrpSpPr>
+      <p:grpSpPr>
+        <a:xfrm>
+          <a:off x="0" y="0"/>
+          <a:ext cx="0" cy="0"/>
+          <a:chOff x="0" y="0"/>
+          <a:chExt cx="0" cy="0"/>
+        </a:xfrm>
+      </p:grpSpPr>
+      <p:sp>
+        <p:nvSpPr>
+          <p:cNvPr id="2" name="Text 0"/>
+          <p:cNvSpPr/>
+          <p:nvPr/>
+        </p:nvSpPr>
+        <p:spPr>
+          <a:xfrm>
+            <a:off x="0" y="0"/>
+            <a:ext cx="9144000" cy="101501"/>
+          </a:xfrm>
+          <a:prstGeom prst="rect">
+            <a:avLst/>
+          </a:prstGeom>
+          <a:solidFill>
+            <a:srgbClr val="5D1D2E"/>
+          </a:solidFill>
+          <a:ln/>
+        </p:spPr>
+        <p:txBody>
+          <a:bodyPr wrap="square" rtlCol="0" anchor="ctr"/>
+          <a:lstStyle/>
+          <a:p>
+            <a:pPr indent="0" marL="0">
+              <a:buNone/>
+            </a:pPr>
+            <a:endParaRPr lang="en-US" dirty="0"/>
+          </a:p>
+        </p:txBody>
+      </p:sp>
+      <p:sp>
+        <p:nvSpPr>
+          <p:cNvPr id="3" name="Text 1"/>
+          <p:cNvSpPr/>
+          <p:nvPr/>
+        </p:nvSpPr>
+        <p:spPr>
+          <a:xfrm>
+            <a:off x="406301" y="457051"/>
+            <a:ext cx="8498026" cy="274290"/>
+          </a:xfrm>
+          <a:prstGeom prst="rect">
+            <a:avLst/>
+          </a:prstGeom>
+          <a:noFill/>
+          <a:ln/>
+        </p:spPr>
+        <p:txBody>
+          <a:bodyPr wrap="square" lIns="0" tIns="0" rIns="0" bIns="0" rtlCol="0" anchor="t"/>
+          <a:lstStyle/>
+          <a:p>
+            <a:pPr algn="l" indent="0" marL="0">
+              <a:lnSpc>
+                <a:spcPts val="2160"/>
+              </a:lnSpc>
+              <a:spcBef>
+                <a:spcPts val="600"/>
+              </a:spcBef>
+              <a:spcAft>
+                <a:spcPts val="800"/>
+              </a:spcAft>
+              <a:buNone/>
+            </a:pPr>
+            <a:r>
+              <a:rPr lang="en-US" sz="1800" b="1" dirty="0">
+                <a:solidFill>
+                  <a:srgbClr val="997929"/>
+                </a:solidFill>
+                <a:latin typeface="Times New Roman" pitchFamily="34" charset="0"/>
+                <a:ea typeface="Times New Roman" pitchFamily="34" charset="-122"/>
+                <a:cs typeface="Times New Roman" pitchFamily="34" charset="-120"/>
+              </a:rPr>
+              <a:t>Differentiation</a:t>
+            </a:r>
+            <a:endParaRPr lang="en-US" sz="1800" dirty="0"/>
+          </a:p>
+        </p:txBody>
+      </p:sp>
+      <p:sp>
+        <p:nvSpPr>
+          <p:cNvPr id="4" name="Text 2"/>
+          <p:cNvSpPr/>
+          <p:nvPr/>
+        </p:nvSpPr>
+        <p:spPr>
+          <a:xfrm>
+            <a:off x="634901" y="883593"/>
+            <a:ext cx="8102798" cy="525661"/>
+          </a:xfrm>
+          <a:prstGeom prst="rect">
+            <a:avLst/>
+          </a:prstGeom>
+          <a:noFill/>
+          <a:ln/>
+        </p:spPr>
+        <p:txBody>
+          <a:bodyPr wrap="square" lIns="0" tIns="0" rIns="0" bIns="0" rtlCol="0" anchor="t"/>
+          <a:lstStyle/>
+          <a:p>
+            <a:pPr algn="l" marL="342900" indent="-342900">
+              <a:lnSpc>
+                <a:spcPts val="1620"/>
+              </a:lnSpc>
+              <a:spcAft>
+                <a:spcPts val="300"/>
+              </a:spcAft>
+              <a:buSzPct val="100000"/>
+              <a:buChar char="•"/>
+            </a:pPr>
+            <a:r>
+              <a:rPr lang="en-US" sz="1200" b="1" dirty="0">
+                <a:solidFill>
+                  <a:srgbClr val="1A1A1A"/>
+                </a:solidFill>
+                <a:latin typeface="Georgia" pitchFamily="34" charset="0"/>
+                <a:ea typeface="Georgia" pitchFamily="34" charset="-122"/>
+                <a:cs typeface="Georgia" pitchFamily="34" charset="-120"/>
+              </a:rPr>
+              <a:t>Tier up:</a:t>
+            </a:r>
+            <a:pPr algn="l" indent="0" marL="0">
+              <a:lnSpc>
+                <a:spcPts val="1620"/>
+              </a:lnSpc>
+              <a:spcAft>
+                <a:spcPts val="300"/>
+              </a:spcAft>
+              <a:buNone/>
+            </a:pPr>
+            <a:r>
+              <a:rPr lang="en-US" sz="1200" dirty="0">
+                <a:solidFill>
+                  <a:srgbClr val="1A1A1A"/>
+                </a:solidFill>
+                <a:latin typeface="Georgia" pitchFamily="34" charset="0"/>
+                <a:ea typeface="Georgia" pitchFamily="34" charset="-122"/>
+                <a:cs typeface="Georgia" pitchFamily="34" charset="-120"/>
+              </a:rPr>
+              <a:t> Read Pingree, D. (1996). "Astronomy in India" in </a:t>
+            </a:r>
+            <a:pPr algn="l" indent="0" marL="0">
+              <a:lnSpc>
+                <a:spcPts val="1620"/>
+              </a:lnSpc>
+              <a:spcAft>
+                <a:spcPts val="300"/>
+              </a:spcAft>
+              <a:buNone/>
+            </a:pPr>
+            <a:r>
+              <a:rPr lang="en-US" sz="1200" i="1" dirty="0">
+                <a:solidFill>
+                  <a:srgbClr val="1A1A1A"/>
+                </a:solidFill>
+                <a:latin typeface="Georgia" pitchFamily="34" charset="0"/>
+                <a:ea typeface="Georgia" pitchFamily="34" charset="-122"/>
+                <a:cs typeface="Georgia" pitchFamily="34" charset="-120"/>
+              </a:rPr>
+              <a:t>Astronomy Before the Telescope</a:t>
+            </a:r>
+            <a:pPr algn="l" indent="0" marL="0">
+              <a:lnSpc>
+                <a:spcPts val="1620"/>
+              </a:lnSpc>
+              <a:spcAft>
+                <a:spcPts val="300"/>
+              </a:spcAft>
+              <a:buNone/>
+            </a:pPr>
+            <a:r>
+              <a:rPr lang="en-US" sz="1200" dirty="0">
+                <a:solidFill>
+                  <a:srgbClr val="1A1A1A"/>
+                </a:solidFill>
+                <a:latin typeface="Georgia" pitchFamily="34" charset="0"/>
+                <a:ea typeface="Georgia" pitchFamily="34" charset="-122"/>
+                <a:cs typeface="Georgia" pitchFamily="34" charset="-120"/>
+              </a:rPr>
+              <a:t>.</a:t>
+            </a:r>
+            <a:endParaRPr lang="en-US" sz="1200" dirty="0"/>
+          </a:p>
+          <a:p>
+            <a:pPr algn="l" marL="342900" indent="-342900">
+              <a:lnSpc>
+                <a:spcPts val="1620"/>
+              </a:lnSpc>
+              <a:spcAft>
+                <a:spcPts val="300"/>
+              </a:spcAft>
+              <a:buSzPct val="100000"/>
+              <a:buChar char="•"/>
+            </a:pPr>
+            <a:r>
+              <a:rPr lang="en-US" sz="1200" b="1" dirty="0">
+                <a:solidFill>
+                  <a:srgbClr val="1A1A1A"/>
+                </a:solidFill>
+                <a:latin typeface="Georgia" pitchFamily="34" charset="0"/>
+                <a:ea typeface="Georgia" pitchFamily="34" charset="-122"/>
+                <a:cs typeface="Georgia" pitchFamily="34" charset="-120"/>
+              </a:rPr>
+              <a:t>Tier down:</a:t>
+            </a:r>
+            <a:pPr algn="l" indent="0" marL="0">
+              <a:lnSpc>
+                <a:spcPts val="1620"/>
+              </a:lnSpc>
+              <a:spcAft>
+                <a:spcPts val="300"/>
+              </a:spcAft>
+              <a:buNone/>
+            </a:pPr>
+            <a:r>
+              <a:rPr lang="en-US" sz="1200" dirty="0">
+                <a:solidFill>
+                  <a:srgbClr val="1A1A1A"/>
+                </a:solidFill>
+                <a:latin typeface="Georgia" pitchFamily="34" charset="0"/>
+                <a:ea typeface="Georgia" pitchFamily="34" charset="-122"/>
+                <a:cs typeface="Georgia" pitchFamily="34" charset="-120"/>
+              </a:rPr>
+              <a:t> Focus on the three achievements; the Yavana question is the depth layer.</a:t>
+            </a:r>
+            <a:endParaRPr lang="en-US" sz="1200" dirty="0"/>
+          </a:p>
+        </p:txBody>
+      </p:sp>
+      <p:sp>
+        <p:nvSpPr>
+          <p:cNvPr id="5" name="Text 3"/>
+          <p:cNvSpPr/>
+          <p:nvPr/>
+        </p:nvSpPr>
+        <p:spPr>
+          <a:xfrm>
+            <a:off x="406301" y="4434929"/>
+            <a:ext cx="8498026" cy="213271"/>
+          </a:xfrm>
+          <a:prstGeom prst="rect">
+            <a:avLst/>
+          </a:prstGeom>
+          <a:noFill/>
+          <a:ln/>
+        </p:spPr>
+        <p:txBody>
+          <a:bodyPr wrap="square" lIns="0" tIns="0" rIns="0" bIns="0" rtlCol="0" anchor="t"/>
+          <a:lstStyle/>
+          <a:p>
+            <a:pPr algn="l" indent="0" marL="0">
+              <a:lnSpc>
+                <a:spcPts val="1680"/>
+              </a:lnSpc>
+              <a:spcBef>
+                <a:spcPts val="300"/>
+              </a:spcBef>
+              <a:spcAft>
+                <a:spcPts val="300"/>
+              </a:spcAft>
+              <a:buNone/>
+            </a:pPr>
+            <a:r>
+              <a:rPr lang="en-US" sz="1200" dirty="0">
+                <a:solidFill>
+                  <a:srgbClr val="1A1A1A"/>
+                </a:solidFill>
+                <a:latin typeface="Georgia" pitchFamily="34" charset="0"/>
+                <a:ea typeface="Georgia" pitchFamily="34" charset="-122"/>
+                <a:cs typeface="Georgia" pitchFamily="34" charset="-120"/>
+              </a:rPr>
+              <a:t>Senior ·  · IKS Curriculum</a:t>
+            </a:r>
+            <a:endParaRPr lang="en-US" sz="1200" dirty="0"/>
+          </a:p>
+        </p:txBody>
+      </p:sp>
+    </p:spTree>
+  </p:cSld>
+  <p:clrMapOvr>
+    <a:masterClrMapping/>
+  </p:clrMapOvr>
+</p:sld>
+</file>
+
+<file path=ppt/slides/slide13.xml><?xml version="1.0" encoding="utf-8"?>
+<p:sld xmlns:a="http://schemas.openxmlformats.org/drawingml/2006/main" xmlns:r="http://schemas.openxmlformats.org/officeDocument/2006/relationships" xmlns:p="http://schemas.openxmlformats.org/presentationml/2006/main">
+  <p:cSld name="Slide 13">
+    <p:bg>
+      <p:bgPr>
+        <a:solidFill>
+          <a:srgbClr val="FAF7F2"/>
+        </a:solidFill>
+      </p:bgPr>
+    </p:bg>
+    <p:spTree>
+      <p:nvGrpSpPr>
+        <p:cNvPr id="1" name=""/>
+        <p:cNvGrpSpPr/>
+        <p:nvPr/>
+      </p:nvGrpSpPr>
+      <p:grpSpPr>
+        <a:xfrm>
+          <a:off x="0" y="0"/>
+          <a:ext cx="0" cy="0"/>
+          <a:chOff x="0" y="0"/>
+          <a:chExt cx="0" cy="0"/>
+        </a:xfrm>
+      </p:grpSpPr>
+      <p:sp>
+        <p:nvSpPr>
+          <p:cNvPr id="2" name="Text 0"/>
+          <p:cNvSpPr/>
+          <p:nvPr/>
+        </p:nvSpPr>
+        <p:spPr>
+          <a:xfrm>
+            <a:off x="0" y="0"/>
+            <a:ext cx="9144000" cy="101501"/>
+          </a:xfrm>
+          <a:prstGeom prst="rect">
+            <a:avLst/>
+          </a:prstGeom>
+          <a:solidFill>
+            <a:srgbClr val="5D1D2E"/>
+          </a:solidFill>
+          <a:ln/>
+        </p:spPr>
+        <p:txBody>
+          <a:bodyPr wrap="square" rtlCol="0" anchor="ctr"/>
+          <a:lstStyle/>
+          <a:p>
+            <a:pPr indent="0" marL="0">
+              <a:buNone/>
+            </a:pPr>
+            <a:endParaRPr lang="en-US" dirty="0"/>
+          </a:p>
+        </p:txBody>
+      </p:sp>
+      <p:sp>
+        <p:nvSpPr>
+          <p:cNvPr id="3" name="Text 1"/>
+          <p:cNvSpPr/>
+          <p:nvPr/>
+        </p:nvSpPr>
+        <p:spPr>
+          <a:xfrm>
+            <a:off x="406301" y="457051"/>
+            <a:ext cx="8498026" cy="274290"/>
+          </a:xfrm>
+          <a:prstGeom prst="rect">
+            <a:avLst/>
+          </a:prstGeom>
+          <a:noFill/>
+          <a:ln/>
+        </p:spPr>
+        <p:txBody>
+          <a:bodyPr wrap="square" lIns="0" tIns="0" rIns="0" bIns="0" rtlCol="0" anchor="t"/>
+          <a:lstStyle/>
+          <a:p>
+            <a:pPr algn="l" indent="0" marL="0">
+              <a:lnSpc>
+                <a:spcPts val="2160"/>
+              </a:lnSpc>
+              <a:spcBef>
+                <a:spcPts val="600"/>
+              </a:spcBef>
+              <a:spcAft>
+                <a:spcPts val="800"/>
+              </a:spcAft>
+              <a:buNone/>
+            </a:pPr>
+            <a:r>
+              <a:rPr lang="en-US" sz="1800" b="1" dirty="0">
+                <a:solidFill>
+                  <a:srgbClr val="997929"/>
+                </a:solidFill>
+                <a:latin typeface="Times New Roman" pitchFamily="34" charset="0"/>
+                <a:ea typeface="Times New Roman" pitchFamily="34" charset="-122"/>
+                <a:cs typeface="Times New Roman" pitchFamily="34" charset="-120"/>
+              </a:rPr>
+              <a:t>Teacher notes</a:t>
+            </a:r>
+            <a:endParaRPr lang="en-US" sz="1800" dirty="0"/>
+          </a:p>
+        </p:txBody>
+      </p:sp>
+      <p:sp>
+        <p:nvSpPr>
+          <p:cNvPr id="4" name="Text 2"/>
+          <p:cNvSpPr/>
+          <p:nvPr/>
+        </p:nvSpPr>
+        <p:spPr>
+          <a:xfrm>
+            <a:off x="634901" y="883593"/>
+            <a:ext cx="8102798" cy="487561"/>
+          </a:xfrm>
+          <a:prstGeom prst="rect">
+            <a:avLst/>
+          </a:prstGeom>
+          <a:noFill/>
+          <a:ln/>
+        </p:spPr>
+        <p:txBody>
+          <a:bodyPr wrap="square" lIns="0" tIns="0" rIns="0" bIns="0" rtlCol="0" anchor="t"/>
+          <a:lstStyle/>
+          <a:p>
+            <a:pPr algn="l" marL="342900" indent="-342900">
+              <a:lnSpc>
+                <a:spcPts val="1620"/>
+              </a:lnSpc>
+              <a:spcAft>
+                <a:spcPts val="300"/>
+              </a:spcAft>
+              <a:buSzPct val="100000"/>
+              <a:buChar char="•"/>
+            </a:pPr>
+            <a:r>
+              <a:rPr lang="en-US" sz="1200" dirty="0">
+                <a:solidFill>
+                  <a:srgbClr val="1A1A1A"/>
+                </a:solidFill>
+                <a:latin typeface="Georgia" pitchFamily="34" charset="0"/>
+                <a:ea typeface="Georgia" pitchFamily="34" charset="-122"/>
+                <a:cs typeface="Georgia" pitchFamily="34" charset="-120"/>
+              </a:rPr>
+              <a:t>The Yavana evidence is well-documented. Don't shy from it. Honest history shows the Indian tradition as participant in a wider scholarly world.</a:t>
+            </a:r>
+            <a:endParaRPr lang="en-US" sz="1200" dirty="0"/>
+          </a:p>
+        </p:txBody>
+      </p:sp>
+      <p:sp>
+        <p:nvSpPr>
+          <p:cNvPr id="5" name="Text 3"/>
+          <p:cNvSpPr/>
+          <p:nvPr/>
+        </p:nvSpPr>
+        <p:spPr>
+          <a:xfrm>
+            <a:off x="406301" y="4434929"/>
+            <a:ext cx="8498026" cy="213271"/>
+          </a:xfrm>
+          <a:prstGeom prst="rect">
+            <a:avLst/>
+          </a:prstGeom>
+          <a:noFill/>
+          <a:ln/>
+        </p:spPr>
+        <p:txBody>
+          <a:bodyPr wrap="square" lIns="0" tIns="0" rIns="0" bIns="0" rtlCol="0" anchor="t"/>
+          <a:lstStyle/>
+          <a:p>
+            <a:pPr algn="l" indent="0" marL="0">
+              <a:lnSpc>
+                <a:spcPts val="1680"/>
+              </a:lnSpc>
+              <a:spcBef>
+                <a:spcPts val="300"/>
+              </a:spcBef>
+              <a:spcAft>
+                <a:spcPts val="300"/>
+              </a:spcAft>
+              <a:buNone/>
+            </a:pPr>
+            <a:r>
+              <a:rPr lang="en-US" sz="1200" dirty="0">
+                <a:solidFill>
+                  <a:srgbClr val="1A1A1A"/>
+                </a:solidFill>
+                <a:latin typeface="Georgia" pitchFamily="34" charset="0"/>
+                <a:ea typeface="Georgia" pitchFamily="34" charset="-122"/>
+                <a:cs typeface="Georgia" pitchFamily="34" charset="-120"/>
+              </a:rPr>
+              <a:t>Senior ·  · IKS Curriculum</a:t>
+            </a:r>
+            <a:endParaRPr lang="en-US" sz="1200" dirty="0"/>
+          </a:p>
+        </p:txBody>
+      </p:sp>
+    </p:spTree>
+  </p:cSld>
+  <p:clrMapOvr>
+    <a:masterClrMapping/>
+  </p:clrMapOvr>
+</p:sld>
+</file>
+
+<file path=ppt/slides/slide14.xml><?xml version="1.0" encoding="utf-8"?>
+<p:sld xmlns:a="http://schemas.openxmlformats.org/drawingml/2006/main" xmlns:r="http://schemas.openxmlformats.org/officeDocument/2006/relationships" xmlns:p="http://schemas.openxmlformats.org/presentationml/2006/main">
+  <p:cSld name="Slide 14">
+    <p:bg>
+      <p:bgPr>
+        <a:solidFill>
+          <a:srgbClr val="FAF7F2"/>
+        </a:solidFill>
+      </p:bgPr>
+    </p:bg>
+    <p:spTree>
+      <p:nvGrpSpPr>
+        <p:cNvPr id="1" name=""/>
+        <p:cNvGrpSpPr/>
+        <p:nvPr/>
+      </p:nvGrpSpPr>
+      <p:grpSpPr>
+        <a:xfrm>
+          <a:off x="0" y="0"/>
+          <a:ext cx="0" cy="0"/>
+          <a:chOff x="0" y="0"/>
+          <a:chExt cx="0" cy="0"/>
+        </a:xfrm>
+      </p:grpSpPr>
+      <p:sp>
+        <p:nvSpPr>
+          <p:cNvPr id="2" name="Text 0"/>
+          <p:cNvSpPr/>
+          <p:nvPr/>
+        </p:nvSpPr>
+        <p:spPr>
+          <a:xfrm>
+            <a:off x="0" y="0"/>
+            <a:ext cx="9144000" cy="101501"/>
+          </a:xfrm>
+          <a:prstGeom prst="rect">
+            <a:avLst/>
+          </a:prstGeom>
+          <a:solidFill>
+            <a:srgbClr val="5D1D2E"/>
+          </a:solidFill>
+          <a:ln/>
+        </p:spPr>
+        <p:txBody>
+          <a:bodyPr wrap="square" rtlCol="0" anchor="ctr"/>
+          <a:lstStyle/>
+          <a:p>
+            <a:pPr indent="0" marL="0">
+              <a:buNone/>
+            </a:pPr>
+            <a:endParaRPr lang="en-US" dirty="0"/>
+          </a:p>
+        </p:txBody>
+      </p:sp>
+      <p:sp>
+        <p:nvSpPr>
+          <p:cNvPr id="3" name="Text 1"/>
+          <p:cNvSpPr/>
+          <p:nvPr/>
+        </p:nvSpPr>
+        <p:spPr>
+          <a:xfrm>
+            <a:off x="406301" y="457051"/>
+            <a:ext cx="8498026" cy="274290"/>
+          </a:xfrm>
+          <a:prstGeom prst="rect">
+            <a:avLst/>
+          </a:prstGeom>
+          <a:noFill/>
+          <a:ln/>
+        </p:spPr>
+        <p:txBody>
+          <a:bodyPr wrap="square" lIns="0" tIns="0" rIns="0" bIns="0" rtlCol="0" anchor="t"/>
+          <a:lstStyle/>
+          <a:p>
+            <a:pPr algn="l" indent="0" marL="0">
+              <a:lnSpc>
+                <a:spcPts val="2160"/>
+              </a:lnSpc>
+              <a:spcBef>
+                <a:spcPts val="600"/>
+              </a:spcBef>
+              <a:spcAft>
+                <a:spcPts val="800"/>
+              </a:spcAft>
+              <a:buNone/>
+            </a:pPr>
+            <a:r>
+              <a:rPr lang="en-US" sz="1800" b="1" dirty="0">
+                <a:solidFill>
+                  <a:srgbClr val="997929"/>
+                </a:solidFill>
+                <a:latin typeface="Times New Roman" pitchFamily="34" charset="0"/>
+                <a:ea typeface="Times New Roman" pitchFamily="34" charset="-122"/>
+                <a:cs typeface="Times New Roman" pitchFamily="34" charset="-120"/>
+              </a:rPr>
+              <a:t>Citation(s) used</a:t>
+            </a:r>
+            <a:endParaRPr lang="en-US" sz="1800" dirty="0"/>
+          </a:p>
+        </p:txBody>
+      </p:sp>
+      <p:sp>
+        <p:nvSpPr>
+          <p:cNvPr id="4" name="Text 2"/>
+          <p:cNvSpPr/>
+          <p:nvPr/>
+        </p:nvSpPr>
+        <p:spPr>
+          <a:xfrm>
+            <a:off x="634901" y="883593"/>
+            <a:ext cx="8102798" cy="769441"/>
+          </a:xfrm>
+          <a:prstGeom prst="rect">
+            <a:avLst/>
+          </a:prstGeom>
+          <a:noFill/>
+          <a:ln/>
+        </p:spPr>
+        <p:txBody>
+          <a:bodyPr wrap="square" lIns="0" tIns="0" rIns="0" bIns="0" rtlCol="0" anchor="t"/>
+          <a:lstStyle/>
+          <a:p>
+            <a:pPr algn="l" marL="342900" indent="-342900">
+              <a:lnSpc>
+                <a:spcPts val="1620"/>
+              </a:lnSpc>
+              <a:spcAft>
+                <a:spcPts val="300"/>
+              </a:spcAft>
+              <a:buSzPct val="100000"/>
+              <a:buChar char="•"/>
+            </a:pPr>
+            <a:r>
+              <a:rPr lang="en-US" sz="1200" dirty="0">
+                <a:solidFill>
+                  <a:srgbClr val="1A1A1A"/>
+                </a:solidFill>
+                <a:latin typeface="Georgia" pitchFamily="34" charset="0"/>
+                <a:ea typeface="Georgia" pitchFamily="34" charset="-122"/>
+                <a:cs typeface="Georgia" pitchFamily="34" charset="-120"/>
+              </a:rPr>
+              <a:t>Aryabhata, </a:t>
+            </a:r>
+            <a:pPr algn="l" indent="0" marL="0">
+              <a:lnSpc>
+                <a:spcPts val="1620"/>
+              </a:lnSpc>
+              <a:spcAft>
+                <a:spcPts val="300"/>
+              </a:spcAft>
+              <a:buNone/>
+            </a:pPr>
+            <a:r>
+              <a:rPr lang="en-US" sz="1200" i="1" dirty="0">
+                <a:solidFill>
+                  <a:srgbClr val="1A1A1A"/>
+                </a:solidFill>
+                <a:latin typeface="Georgia" pitchFamily="34" charset="0"/>
+                <a:ea typeface="Georgia" pitchFamily="34" charset="-122"/>
+                <a:cs typeface="Georgia" pitchFamily="34" charset="-120"/>
+              </a:rPr>
+              <a:t>Aryabhaṭīya</a:t>
+            </a:r>
+            <a:pPr algn="l" indent="0" marL="0">
+              <a:lnSpc>
+                <a:spcPts val="1620"/>
+              </a:lnSpc>
+              <a:spcAft>
+                <a:spcPts val="300"/>
+              </a:spcAft>
+              <a:buNone/>
+            </a:pPr>
+            <a:r>
+              <a:rPr lang="en-US" sz="1200" dirty="0">
+                <a:solidFill>
+                  <a:srgbClr val="1A1A1A"/>
+                </a:solidFill>
+                <a:latin typeface="Georgia" pitchFamily="34" charset="0"/>
+                <a:ea typeface="Georgia" pitchFamily="34" charset="-122"/>
+                <a:cs typeface="Georgia" pitchFamily="34" charset="-120"/>
+              </a:rPr>
+              <a:t> (499 CE) — Clark (1930).</a:t>
+            </a:r>
+            <a:endParaRPr lang="en-US" sz="1200" dirty="0"/>
+          </a:p>
+          <a:p>
+            <a:pPr algn="l" marL="342900" indent="-342900">
+              <a:lnSpc>
+                <a:spcPts val="1620"/>
+              </a:lnSpc>
+              <a:spcAft>
+                <a:spcPts val="300"/>
+              </a:spcAft>
+              <a:buSzPct val="100000"/>
+              <a:buChar char="•"/>
+            </a:pPr>
+            <a:r>
+              <a:rPr lang="en-US" sz="1200" dirty="0">
+                <a:solidFill>
+                  <a:srgbClr val="1A1A1A"/>
+                </a:solidFill>
+                <a:latin typeface="Georgia" pitchFamily="34" charset="0"/>
+                <a:ea typeface="Georgia" pitchFamily="34" charset="-122"/>
+                <a:cs typeface="Georgia" pitchFamily="34" charset="-120"/>
+              </a:rPr>
+              <a:t>Varāhamihira, </a:t>
+            </a:r>
+            <a:pPr algn="l" indent="0" marL="0">
+              <a:lnSpc>
+                <a:spcPts val="1620"/>
+              </a:lnSpc>
+              <a:spcAft>
+                <a:spcPts val="300"/>
+              </a:spcAft>
+              <a:buNone/>
+            </a:pPr>
+            <a:r>
+              <a:rPr lang="en-US" sz="1200" i="1" dirty="0">
+                <a:solidFill>
+                  <a:srgbClr val="1A1A1A"/>
+                </a:solidFill>
+                <a:latin typeface="Georgia" pitchFamily="34" charset="0"/>
+                <a:ea typeface="Georgia" pitchFamily="34" charset="-122"/>
+                <a:cs typeface="Georgia" pitchFamily="34" charset="-120"/>
+              </a:rPr>
+              <a:t>Pañca-siddhāntikā</a:t>
+            </a:r>
+            <a:pPr algn="l" indent="0" marL="0">
+              <a:lnSpc>
+                <a:spcPts val="1620"/>
+              </a:lnSpc>
+              <a:spcAft>
+                <a:spcPts val="300"/>
+              </a:spcAft>
+              <a:buNone/>
+            </a:pPr>
+            <a:r>
+              <a:rPr lang="en-US" sz="1200" dirty="0">
+                <a:solidFill>
+                  <a:srgbClr val="1A1A1A"/>
+                </a:solidFill>
+                <a:latin typeface="Georgia" pitchFamily="34" charset="0"/>
+                <a:ea typeface="Georgia" pitchFamily="34" charset="-122"/>
+                <a:cs typeface="Georgia" pitchFamily="34" charset="-120"/>
+              </a:rPr>
+              <a:t> — Neugebauer &amp; Pingree (1971).</a:t>
+            </a:r>
+            <a:endParaRPr lang="en-US" sz="1200" dirty="0"/>
+          </a:p>
+          <a:p>
+            <a:pPr algn="l" marL="342900" indent="-342900">
+              <a:lnSpc>
+                <a:spcPts val="1620"/>
+              </a:lnSpc>
+              <a:spcAft>
+                <a:spcPts val="300"/>
+              </a:spcAft>
+              <a:buSzPct val="100000"/>
+              <a:buChar char="•"/>
+            </a:pPr>
+            <a:r>
+              <a:rPr lang="en-US" sz="1200" dirty="0">
+                <a:solidFill>
+                  <a:srgbClr val="1A1A1A"/>
+                </a:solidFill>
+                <a:latin typeface="Georgia" pitchFamily="34" charset="0"/>
+                <a:ea typeface="Georgia" pitchFamily="34" charset="-122"/>
+                <a:cs typeface="Georgia" pitchFamily="34" charset="-120"/>
+              </a:rPr>
+              <a:t>Pingree (1996).</a:t>
+            </a:r>
+            <a:endParaRPr lang="en-US" sz="1200" dirty="0"/>
+          </a:p>
+        </p:txBody>
+      </p:sp>
+      <p:sp>
+        <p:nvSpPr>
+          <p:cNvPr id="5" name="Text 3"/>
           <p:cNvSpPr/>
           <p:nvPr/>
         </p:nvSpPr>
@@ -2027,7 +3712,7 @@
                 <a:ea typeface="Times New Roman" pitchFamily="34" charset="-122"/>
                 <a:cs typeface="Times New Roman" pitchFamily="34" charset="-120"/>
               </a:rPr>
-              <a:t>Materials</a:t>
+              <a:t>Learning objective</a:t>
             </a:r>
             <a:endParaRPr lang="en-US" sz="1800" dirty="0"/>
           </a:p>
@@ -2075,53 +3760,7 @@
                 <a:ea typeface="Georgia" pitchFamily="34" charset="-122"/>
                 <a:cs typeface="Georgia" pitchFamily="34" charset="-120"/>
               </a:rPr>
-              <a:t>– Printed handout: one verse from Aryabhaṭīya in translation – Printed extract from Varāhamihira's </a:t>
-            </a:r>
-            <a:pPr algn="l" indent="0" marL="0">
-              <a:lnSpc>
-                <a:spcPts val="1680"/>
-              </a:lnSpc>
-              <a:spcBef>
-                <a:spcPts val="300"/>
-              </a:spcBef>
-              <a:spcAft>
-                <a:spcPts val="300"/>
-              </a:spcAft>
-              <a:buNone/>
-            </a:pPr>
-            <a:r>
-              <a:rPr lang="en-US" sz="1200" i="1" dirty="0">
-                <a:solidFill>
-                  <a:srgbClr val="1A1A1A"/>
-                </a:solidFill>
-                <a:latin typeface="Georgia" pitchFamily="34" charset="0"/>
-                <a:ea typeface="Georgia" pitchFamily="34" charset="-122"/>
-                <a:cs typeface="Georgia" pitchFamily="34" charset="-120"/>
-              </a:rPr>
-              <a:t>Pañca-siddhāntikā</a:t>
-            </a:r>
-            <a:pPr algn="l" indent="0" marL="0">
-              <a:lnSpc>
-                <a:spcPts val="1680"/>
-              </a:lnSpc>
-              <a:spcBef>
-                <a:spcPts val="300"/>
-              </a:spcBef>
-              <a:spcAft>
-                <a:spcPts val="300"/>
-              </a:spcAft>
-              <a:buNone/>
-            </a:pPr>
-            <a:r>
-              <a:rPr lang="en-US" sz="1200" dirty="0">
-                <a:solidFill>
-                  <a:srgbClr val="1A1A1A"/>
-                </a:solidFill>
-                <a:latin typeface="Georgia" pitchFamily="34" charset="0"/>
-                <a:ea typeface="Georgia" pitchFamily="34" charset="-122"/>
-                <a:cs typeface="Georgia" pitchFamily="34" charset="-120"/>
-              </a:rPr>
-              <a:t> (in translation)</a:t>
+              <a:t>Students articulate three specific Indian astronomical achievements AND the Greek-Indian intellectual exchange that complicates the "purely Indian" framing.</a:t>
             </a:r>
             <a:endParaRPr lang="en-US" sz="1200" dirty="0"/>
           </a:p>
@@ -2279,7 +3918,7 @@
                 <a:ea typeface="Times New Roman" pitchFamily="34" charset="-122"/>
                 <a:cs typeface="Times New Roman" pitchFamily="34" charset="-120"/>
               </a:rPr>
-              <a:t>Flow</a:t>
+              <a:t>Materials</a:t>
             </a:r>
             <a:endParaRPr lang="en-US" sz="1800" dirty="0"/>
           </a:p>
@@ -2288,6 +3927,116 @@
       <p:sp>
         <p:nvSpPr>
           <p:cNvPr id="4" name="Text 2"/>
+          <p:cNvSpPr/>
+          <p:nvPr/>
+        </p:nvSpPr>
+        <p:spPr>
+          <a:xfrm>
+            <a:off x="634901" y="883593"/>
+            <a:ext cx="8102798" cy="525661"/>
+          </a:xfrm>
+          <a:prstGeom prst="rect">
+            <a:avLst/>
+          </a:prstGeom>
+          <a:noFill/>
+          <a:ln/>
+        </p:spPr>
+        <p:txBody>
+          <a:bodyPr wrap="square" lIns="0" tIns="0" rIns="0" bIns="0" rtlCol="0" anchor="t"/>
+          <a:lstStyle/>
+          <a:p>
+            <a:pPr algn="l" marL="342900" indent="-342900">
+              <a:lnSpc>
+                <a:spcPts val="1620"/>
+              </a:lnSpc>
+              <a:spcAft>
+                <a:spcPts val="300"/>
+              </a:spcAft>
+              <a:buSzPct val="100000"/>
+              <a:buChar char="•"/>
+            </a:pPr>
+            <a:r>
+              <a:rPr lang="en-US" sz="1200" dirty="0">
+                <a:solidFill>
+                  <a:srgbClr val="1A1A1A"/>
+                </a:solidFill>
+                <a:latin typeface="Georgia" pitchFamily="34" charset="0"/>
+                <a:ea typeface="Georgia" pitchFamily="34" charset="-122"/>
+                <a:cs typeface="Georgia" pitchFamily="34" charset="-120"/>
+              </a:rPr>
+              <a:t>Printed handout: one verse from Aryabhaṭīya in translation</a:t>
+            </a:r>
+            <a:endParaRPr lang="en-US" sz="1200" dirty="0"/>
+          </a:p>
+          <a:p>
+            <a:pPr algn="l" marL="342900" indent="-342900">
+              <a:lnSpc>
+                <a:spcPts val="1620"/>
+              </a:lnSpc>
+              <a:spcAft>
+                <a:spcPts val="300"/>
+              </a:spcAft>
+              <a:buSzPct val="100000"/>
+              <a:buChar char="•"/>
+            </a:pPr>
+            <a:r>
+              <a:rPr lang="en-US" sz="1200" dirty="0">
+                <a:solidFill>
+                  <a:srgbClr val="1A1A1A"/>
+                </a:solidFill>
+                <a:latin typeface="Georgia" pitchFamily="34" charset="0"/>
+                <a:ea typeface="Georgia" pitchFamily="34" charset="-122"/>
+                <a:cs typeface="Georgia" pitchFamily="34" charset="-120"/>
+              </a:rPr>
+              <a:t>Printed extract from Varāhamihira's </a:t>
+            </a:r>
+            <a:pPr algn="l" indent="0" marL="0">
+              <a:lnSpc>
+                <a:spcPts val="1620"/>
+              </a:lnSpc>
+              <a:spcAft>
+                <a:spcPts val="300"/>
+              </a:spcAft>
+              <a:buNone/>
+            </a:pPr>
+            <a:r>
+              <a:rPr lang="en-US" sz="1200" i="1" dirty="0">
+                <a:solidFill>
+                  <a:srgbClr val="1A1A1A"/>
+                </a:solidFill>
+                <a:latin typeface="Georgia" pitchFamily="34" charset="0"/>
+                <a:ea typeface="Georgia" pitchFamily="34" charset="-122"/>
+                <a:cs typeface="Georgia" pitchFamily="34" charset="-120"/>
+              </a:rPr>
+              <a:t>Pañca-siddhāntikā</a:t>
+            </a:r>
+            <a:pPr algn="l" indent="0" marL="0">
+              <a:lnSpc>
+                <a:spcPts val="1620"/>
+              </a:lnSpc>
+              <a:spcAft>
+                <a:spcPts val="300"/>
+              </a:spcAft>
+              <a:buNone/>
+            </a:pPr>
+            <a:r>
+              <a:rPr lang="en-US" sz="1200" dirty="0">
+                <a:solidFill>
+                  <a:srgbClr val="1A1A1A"/>
+                </a:solidFill>
+                <a:latin typeface="Georgia" pitchFamily="34" charset="0"/>
+                <a:ea typeface="Georgia" pitchFamily="34" charset="-122"/>
+                <a:cs typeface="Georgia" pitchFamily="34" charset="-120"/>
+              </a:rPr>
+              <a:t> (in translation)</a:t>
+            </a:r>
+            <a:endParaRPr lang="en-US" sz="1200" dirty="0"/>
+          </a:p>
+        </p:txBody>
+      </p:sp>
+      <p:sp>
+        <p:nvSpPr>
+          <p:cNvPr id="5" name="Text 3"/>
           <p:cNvSpPr/>
           <p:nvPr/>
         </p:nvSpPr>
@@ -2437,7 +4186,7 @@
                 <a:ea typeface="Times New Roman" pitchFamily="34" charset="-122"/>
                 <a:cs typeface="Times New Roman" pitchFamily="34" charset="-120"/>
               </a:rPr>
-              <a:t>Warm-up (5 min)</a:t>
+              <a:t>Flow</a:t>
             </a:r>
             <a:endParaRPr lang="en-US" sz="1800" dirty="0"/>
           </a:p>
@@ -2446,54 +4195,6 @@
       <p:sp>
         <p:nvSpPr>
           <p:cNvPr id="4" name="Text 2"/>
-          <p:cNvSpPr/>
-          <p:nvPr/>
-        </p:nvSpPr>
-        <p:spPr>
-          <a:xfrm>
-            <a:off x="406301" y="870942"/>
-            <a:ext cx="8498026" cy="213271"/>
-          </a:xfrm>
-          <a:prstGeom prst="rect">
-            <a:avLst/>
-          </a:prstGeom>
-          <a:noFill/>
-          <a:ln/>
-        </p:spPr>
-        <p:txBody>
-          <a:bodyPr wrap="square" lIns="0" tIns="0" rIns="0" bIns="0" rtlCol="0" anchor="t"/>
-          <a:lstStyle/>
-          <a:p>
-            <a:pPr algn="l" indent="0" marL="0">
-              <a:lnSpc>
-                <a:spcPts val="1680"/>
-              </a:lnSpc>
-              <a:spcBef>
-                <a:spcPts val="300"/>
-              </a:spcBef>
-              <a:spcAft>
-                <a:spcPts val="300"/>
-              </a:spcAft>
-              <a:buNone/>
-            </a:pPr>
-            <a:r>
-              <a:rPr lang="en-US" sz="1200" dirty="0">
-                <a:solidFill>
-                  <a:srgbClr val="1A1A1A"/>
-                </a:solidFill>
-                <a:latin typeface="Georgia" pitchFamily="34" charset="0"/>
-                <a:ea typeface="Georgia" pitchFamily="34" charset="-122"/>
-                <a:cs typeface="Georgia" pitchFamily="34" charset="-120"/>
-              </a:rPr>
-              <a:t>Recall: who was Aryabhata? When did he live?</a:t>
-            </a:r>
-            <a:endParaRPr lang="en-US" sz="1200" dirty="0"/>
-          </a:p>
-        </p:txBody>
-      </p:sp>
-      <p:sp>
-        <p:nvSpPr>
-          <p:cNvPr id="5" name="Text 3"/>
           <p:cNvSpPr/>
           <p:nvPr/>
         </p:nvSpPr>
@@ -2643,7 +4344,7 @@
                 <a:ea typeface="Times New Roman" pitchFamily="34" charset="-122"/>
                 <a:cs typeface="Times New Roman" pitchFamily="34" charset="-120"/>
               </a:rPr>
-              <a:t>Discussion (10 min)</a:t>
+              <a:t>Warm-up (5 min)</a:t>
             </a:r>
             <a:endParaRPr lang="en-US" sz="1800" dirty="0"/>
           </a:p>
@@ -2657,8 +4358,8 @@
         </p:nvSpPr>
         <p:spPr>
           <a:xfrm>
-            <a:off x="634901" y="883593"/>
-            <a:ext cx="8102798" cy="281880"/>
+            <a:off x="406301" y="870942"/>
+            <a:ext cx="8498026" cy="213271"/>
           </a:xfrm>
           <a:prstGeom prst="rect">
             <a:avLst/>
@@ -2670,26 +4371,28 @@
           <a:bodyPr wrap="square" lIns="0" tIns="0" rIns="0" bIns="0" rtlCol="0" anchor="t"/>
           <a:lstStyle/>
           <a:p>
-            <a:pPr algn="l" marL="342900" indent="-342900">
-              <a:lnSpc>
-                <a:spcPts val="1620"/>
-              </a:lnSpc>
-              <a:spcAft>
-                <a:spcPts val="300"/>
-              </a:spcAft>
-              <a:buSzPct val="100000"/>
-              <a:buChar char="•"/>
-            </a:pPr>
-            <a:r>
-              <a:rPr lang="en-US" sz="1200" i="1" dirty="0">
-                <a:solidFill>
-                  <a:srgbClr val="1A1A1A"/>
-                </a:solidFill>
-                <a:latin typeface="Georgia" pitchFamily="34" charset="0"/>
-                <a:ea typeface="Georgia" pitchFamily="34" charset="-122"/>
-                <a:cs typeface="Georgia" pitchFamily="34" charset="-120"/>
-              </a:rPr>
-              <a:t>"Does the Yavana exchange weaken the case for celebrating Indian astronomical achievements?"</a:t>
+            <a:pPr algn="l" indent="0" marL="0">
+              <a:lnSpc>
+                <a:spcPts val="1680"/>
+              </a:lnSpc>
+              <a:spcBef>
+                <a:spcPts val="300"/>
+              </a:spcBef>
+              <a:spcAft>
+                <a:spcPts val="300"/>
+              </a:spcAft>
+              <a:buNone/>
+            </a:pPr>
+            <a:r>
+              <a:rPr lang="en-US" sz="1200" dirty="0">
+                <a:solidFill>
+                  <a:srgbClr val="1A1A1A"/>
+                </a:solidFill>
+                <a:latin typeface="Georgia" pitchFamily="34" charset="0"/>
+                <a:ea typeface="Georgia" pitchFamily="34" charset="-122"/>
+                <a:cs typeface="Georgia" pitchFamily="34" charset="-120"/>
+              </a:rPr>
+              <a:t>Recall: who was Aryabhata? When did he live?</a:t>
             </a:r>
             <a:endParaRPr lang="en-US" sz="1200" dirty="0"/>
           </a:p>
@@ -2698,100 +4401,6 @@
       <p:sp>
         <p:nvSpPr>
           <p:cNvPr id="5" name="Text 3"/>
-          <p:cNvSpPr/>
-          <p:nvPr/>
-        </p:nvSpPr>
-        <p:spPr>
-          <a:xfrm>
-            <a:off x="406301" y="1254323"/>
-            <a:ext cx="8498026" cy="426541"/>
-          </a:xfrm>
-          <a:prstGeom prst="rect">
-            <a:avLst/>
-          </a:prstGeom>
-          <a:noFill/>
-          <a:ln/>
-        </p:spPr>
-        <p:txBody>
-          <a:bodyPr wrap="square" lIns="0" tIns="0" rIns="0" bIns="0" rtlCol="0" anchor="t"/>
-          <a:lstStyle/>
-          <a:p>
-            <a:pPr algn="l" indent="0" marL="0">
-              <a:lnSpc>
-                <a:spcPts val="1680"/>
-              </a:lnSpc>
-              <a:spcBef>
-                <a:spcPts val="300"/>
-              </a:spcBef>
-              <a:spcAft>
-                <a:spcPts val="300"/>
-              </a:spcAft>
-              <a:buNone/>
-            </a:pPr>
-            <a:r>
-              <a:rPr lang="en-US" sz="1200" dirty="0">
-                <a:solidFill>
-                  <a:srgbClr val="1A1A1A"/>
-                </a:solidFill>
-                <a:latin typeface="Georgia" pitchFamily="34" charset="0"/>
-                <a:ea typeface="Georgia" pitchFamily="34" charset="-122"/>
-                <a:cs typeface="Georgia" pitchFamily="34" charset="-120"/>
-              </a:rPr>
-              <a:t>– The honest answer: no. </a:t>
-            </a:r>
-            <a:pPr algn="l" indent="0" marL="0">
-              <a:lnSpc>
-                <a:spcPts val="1680"/>
-              </a:lnSpc>
-              <a:spcBef>
-                <a:spcPts val="300"/>
-              </a:spcBef>
-              <a:spcAft>
-                <a:spcPts val="300"/>
-              </a:spcAft>
-              <a:buNone/>
-            </a:pPr>
-            <a:r>
-              <a:rPr lang="en-US" sz="1200" i="1" dirty="0">
-                <a:solidFill>
-                  <a:srgbClr val="1A1A1A"/>
-                </a:solidFill>
-                <a:latin typeface="Georgia" pitchFamily="34" charset="0"/>
-                <a:ea typeface="Georgia" pitchFamily="34" charset="-122"/>
-                <a:cs typeface="Georgia" pitchFamily="34" charset="-120"/>
-              </a:rPr>
-              <a:t>Synthesis</a:t>
-            </a:r>
-            <a:pPr algn="l" indent="0" marL="0">
-              <a:lnSpc>
-                <a:spcPts val="1680"/>
-              </a:lnSpc>
-              <a:spcBef>
-                <a:spcPts val="300"/>
-              </a:spcBef>
-              <a:spcAft>
-                <a:spcPts val="300"/>
-              </a:spcAft>
-              <a:buNone/>
-            </a:pPr>
-            <a:r>
-              <a:rPr lang="en-US" sz="1200" dirty="0">
-                <a:solidFill>
-                  <a:srgbClr val="1A1A1A"/>
-                </a:solidFill>
-                <a:latin typeface="Georgia" pitchFamily="34" charset="0"/>
-                <a:ea typeface="Georgia" pitchFamily="34" charset="-122"/>
-                <a:cs typeface="Georgia" pitchFamily="34" charset="-120"/>
-              </a:rPr>
-              <a:t> is also an achievement. Indian astronomers absorbed Greek methods AND developed their own (e.g. sine instead of chord, Hindu numerals).</a:t>
-            </a:r>
-            <a:endParaRPr lang="en-US" sz="1200" dirty="0"/>
-          </a:p>
-        </p:txBody>
-      </p:sp>
-      <p:sp>
-        <p:nvSpPr>
-          <p:cNvPr id="6" name="Text 4"/>
           <p:cNvSpPr/>
           <p:nvPr/>
         </p:nvSpPr>
@@ -2941,7 +4550,7 @@
                 <a:ea typeface="Times New Roman" pitchFamily="34" charset="-122"/>
                 <a:cs typeface="Times New Roman" pitchFamily="34" charset="-120"/>
               </a:rPr>
-              <a:t>Wrap-up (5 min)</a:t>
+              <a:t>Core (25 min)</a:t>
             </a:r>
             <a:endParaRPr lang="en-US" sz="1800" dirty="0"/>
           </a:p>
@@ -2955,8 +4564,8 @@
         </p:nvSpPr>
         <p:spPr>
           <a:xfrm>
-            <a:off x="406301" y="870942"/>
-            <a:ext cx="8498026" cy="213271"/>
+            <a:off x="634901" y="883593"/>
+            <a:ext cx="8102798" cy="281880"/>
           </a:xfrm>
           <a:prstGeom prst="rect">
             <a:avLst/>
@@ -2968,13 +4577,31 @@
           <a:bodyPr wrap="square" lIns="0" tIns="0" rIns="0" bIns="0" rtlCol="0" anchor="t"/>
           <a:lstStyle/>
           <a:p>
+            <a:pPr algn="l" marL="342900" indent="-342900">
+              <a:lnSpc>
+                <a:spcPts val="1620"/>
+              </a:lnSpc>
+              <a:spcAft>
+                <a:spcPts val="300"/>
+              </a:spcAft>
+              <a:buSzPct val="100000"/>
+              <a:buChar char="•"/>
+            </a:pPr>
+            <a:r>
+              <a:rPr lang="en-US" sz="1200" b="1" dirty="0">
+                <a:solidFill>
+                  <a:srgbClr val="1A1A1A"/>
+                </a:solidFill>
+                <a:latin typeface="Georgia" pitchFamily="34" charset="0"/>
+                <a:ea typeface="Georgia" pitchFamily="34" charset="-122"/>
+                <a:cs typeface="Georgia" pitchFamily="34" charset="-120"/>
+              </a:rPr>
+              <a:t>Aryabhata (~476–550 CE).</a:t>
+            </a:r>
             <a:pPr algn="l" indent="0" marL="0">
               <a:lnSpc>
-                <a:spcPts val="1680"/>
-              </a:lnSpc>
-              <a:spcBef>
-                <a:spcPts val="300"/>
-              </a:spcBef>
+                <a:spcPts val="1620"/>
+              </a:lnSpc>
               <a:spcAft>
                 <a:spcPts val="300"/>
               </a:spcAft>
@@ -2989,15 +4616,12 @@
                 <a:ea typeface="Georgia" pitchFamily="34" charset="-122"/>
                 <a:cs typeface="Georgia" pitchFamily="34" charset="-120"/>
               </a:rPr>
-              <a:t>– Preview Day 7: </a:t>
+              <a:t> </a:t>
             </a:r>
             <a:pPr algn="l" indent="0" marL="0">
               <a:lnSpc>
-                <a:spcPts val="1680"/>
-              </a:lnSpc>
-              <a:spcBef>
-                <a:spcPts val="300"/>
-              </a:spcBef>
+                <a:spcPts val="1620"/>
+              </a:lnSpc>
               <a:spcAft>
                 <a:spcPts val="300"/>
               </a:spcAft>
@@ -3012,7 +4636,27 @@
                 <a:ea typeface="Georgia" pitchFamily="34" charset="-122"/>
                 <a:cs typeface="Georgia" pitchFamily="34" charset="-120"/>
               </a:rPr>
-              <a:t>"Tomorrow — the contemporary policy debate. NEP §4.6."</a:t>
+              <a:t>Aryabhaṭīya</a:t>
+            </a:r>
+            <a:pPr algn="l" indent="0" marL="0">
+              <a:lnSpc>
+                <a:spcPts val="1620"/>
+              </a:lnSpc>
+              <a:spcAft>
+                <a:spcPts val="300"/>
+              </a:spcAft>
+              <a:buNone/>
+            </a:pPr>
+            <a:r>
+              <a:rPr lang="en-US" sz="1200" dirty="0">
+                <a:solidFill>
+                  <a:srgbClr val="1A1A1A"/>
+                </a:solidFill>
+                <a:latin typeface="Georgia" pitchFamily="34" charset="0"/>
+                <a:ea typeface="Georgia" pitchFamily="34" charset="-122"/>
+                <a:cs typeface="Georgia" pitchFamily="34" charset="-120"/>
+              </a:rPr>
+              <a:t> (499 CE).</a:t>
             </a:r>
             <a:endParaRPr lang="en-US" sz="1200" dirty="0"/>
           </a:p>
@@ -3021,6 +4665,124 @@
       <p:sp>
         <p:nvSpPr>
           <p:cNvPr id="5" name="Text 3"/>
+          <p:cNvSpPr/>
+          <p:nvPr/>
+        </p:nvSpPr>
+        <p:spPr>
+          <a:xfrm>
+            <a:off x="634901" y="1266974"/>
+            <a:ext cx="8102798" cy="1013222"/>
+          </a:xfrm>
+          <a:prstGeom prst="rect">
+            <a:avLst/>
+          </a:prstGeom>
+          <a:noFill/>
+          <a:ln/>
+        </p:spPr>
+        <p:txBody>
+          <a:bodyPr wrap="square" lIns="0" tIns="0" rIns="0" bIns="0" rtlCol="0" anchor="t"/>
+          <a:lstStyle/>
+          <a:p>
+            <a:pPr algn="l" marL="342900" indent="-342900">
+              <a:lnSpc>
+                <a:spcPts val="1620"/>
+              </a:lnSpc>
+              <a:spcAft>
+                <a:spcPts val="300"/>
+              </a:spcAft>
+              <a:buSzPct val="100000"/>
+              <a:buChar char="•"/>
+            </a:pPr>
+            <a:r>
+              <a:rPr lang="en-US" sz="1200" dirty="0">
+                <a:solidFill>
+                  <a:srgbClr val="1A1A1A"/>
+                </a:solidFill>
+                <a:latin typeface="Georgia" pitchFamily="34" charset="0"/>
+                <a:ea typeface="Georgia" pitchFamily="34" charset="-122"/>
+                <a:cs typeface="Georgia" pitchFamily="34" charset="-120"/>
+              </a:rPr>
+              <a:t>Earth rotates on its axis.</a:t>
+            </a:r>
+            <a:endParaRPr lang="en-US" sz="1200" dirty="0"/>
+          </a:p>
+          <a:p>
+            <a:pPr algn="l" marL="342900" indent="-342900">
+              <a:lnSpc>
+                <a:spcPts val="1620"/>
+              </a:lnSpc>
+              <a:spcAft>
+                <a:spcPts val="300"/>
+              </a:spcAft>
+              <a:buSzPct val="100000"/>
+              <a:buChar char="•"/>
+            </a:pPr>
+            <a:r>
+              <a:rPr lang="en-US" sz="1200" dirty="0">
+                <a:solidFill>
+                  <a:srgbClr val="1A1A1A"/>
+                </a:solidFill>
+                <a:latin typeface="Georgia" pitchFamily="34" charset="0"/>
+                <a:ea typeface="Georgia" pitchFamily="34" charset="-122"/>
+                <a:cs typeface="Georgia" pitchFamily="34" charset="-120"/>
+              </a:rPr>
+              <a:t>Approximated π to 4 decimals.</a:t>
+            </a:r>
+            <a:endParaRPr lang="en-US" sz="1200" dirty="0"/>
+          </a:p>
+          <a:p>
+            <a:pPr algn="l" marL="342900" indent="-342900">
+              <a:lnSpc>
+                <a:spcPts val="1620"/>
+              </a:lnSpc>
+              <a:spcAft>
+                <a:spcPts val="300"/>
+              </a:spcAft>
+              <a:buSzPct val="100000"/>
+              <a:buChar char="•"/>
+            </a:pPr>
+            <a:r>
+              <a:rPr lang="en-US" sz="1200" dirty="0">
+                <a:solidFill>
+                  <a:srgbClr val="1A1A1A"/>
+                </a:solidFill>
+                <a:latin typeface="Georgia" pitchFamily="34" charset="0"/>
+                <a:ea typeface="Georgia" pitchFamily="34" charset="-122"/>
+                <a:cs typeface="Georgia" pitchFamily="34" charset="-120"/>
+              </a:rPr>
+              <a:t>Computed planetary periods.</a:t>
+            </a:r>
+            <a:endParaRPr lang="en-US" sz="1200" dirty="0"/>
+          </a:p>
+          <a:p>
+            <a:pPr algn="l" marL="342900" indent="-342900">
+              <a:lnSpc>
+                <a:spcPts val="1620"/>
+              </a:lnSpc>
+              <a:spcAft>
+                <a:spcPts val="300"/>
+              </a:spcAft>
+              <a:buSzPct val="100000"/>
+              <a:buChar char="•"/>
+            </a:pPr>
+            <a:r>
+              <a:rPr lang="en-US" sz="1200" dirty="0">
+                <a:solidFill>
+                  <a:srgbClr val="1A1A1A"/>
+                </a:solidFill>
+                <a:latin typeface="Georgia" pitchFamily="34" charset="0"/>
+                <a:ea typeface="Georgia" pitchFamily="34" charset="-122"/>
+                <a:cs typeface="Georgia" pitchFamily="34" charset="-120"/>
+              </a:rPr>
+              <a:t>Did NOT propose heliocentrism.</a:t>
+            </a:r>
+            <a:endParaRPr lang="en-US" sz="1200" dirty="0"/>
+          </a:p>
+        </p:txBody>
+      </p:sp>
+      <p:sp>
+        <p:nvSpPr>
+          <p:cNvPr id="6" name="Text 4"/>
           <p:cNvSpPr/>
           <p:nvPr/>
         </p:nvSpPr>
@@ -3170,7 +4932,7 @@
                 <a:ea typeface="Times New Roman" pitchFamily="34" charset="-122"/>
                 <a:cs typeface="Times New Roman" pitchFamily="34" charset="-120"/>
               </a:rPr>
-              <a:t>Differentiation</a:t>
+              <a:t>Core (25 min) (cont.)</a:t>
             </a:r>
             <a:endParaRPr lang="en-US" sz="1800" dirty="0"/>
           </a:p>
@@ -3185,7 +4947,7 @@
         <p:spPr>
           <a:xfrm>
             <a:off x="634901" y="883593"/>
-            <a:ext cx="8102798" cy="525661"/>
+            <a:ext cx="8102798" cy="281880"/>
           </a:xfrm>
           <a:prstGeom prst="rect">
             <a:avLst/>
@@ -3216,7 +4978,7 @@
                 <a:ea typeface="Georgia" pitchFamily="34" charset="-122"/>
                 <a:cs typeface="Georgia" pitchFamily="34" charset="-120"/>
               </a:rPr>
-              <a:t>Tier up:</a:t>
+              <a:t>Sūrya-siddhānta (early CE).</a:t>
             </a:r>
             <a:pPr algn="l" indent="0" marL="0">
               <a:lnSpc>
@@ -3236,50 +4998,32 @@
                 <a:ea typeface="Georgia" pitchFamily="34" charset="-122"/>
                 <a:cs typeface="Georgia" pitchFamily="34" charset="-120"/>
               </a:rPr>
-              <a:t> Read Pingree, D. (1996). "Astronomy in India" in </a:t>
-            </a:r>
-            <a:pPr algn="l" indent="0" marL="0">
-              <a:lnSpc>
-                <a:spcPts val="1620"/>
-              </a:lnSpc>
-              <a:spcAft>
-                <a:spcPts val="300"/>
-              </a:spcAft>
-              <a:buNone/>
-            </a:pPr>
-            <a:r>
-              <a:rPr lang="en-US" sz="1200" i="1" dirty="0">
-                <a:solidFill>
-                  <a:srgbClr val="1A1A1A"/>
-                </a:solidFill>
-                <a:latin typeface="Georgia" pitchFamily="34" charset="0"/>
-                <a:ea typeface="Georgia" pitchFamily="34" charset="-122"/>
-                <a:cs typeface="Georgia" pitchFamily="34" charset="-120"/>
-              </a:rPr>
-              <a:t>Astronomy Before the Telescope</a:t>
-            </a:r>
-            <a:pPr algn="l" indent="0" marL="0">
-              <a:lnSpc>
-                <a:spcPts val="1620"/>
-              </a:lnSpc>
-              <a:spcAft>
-                <a:spcPts val="300"/>
-              </a:spcAft>
-              <a:buNone/>
-            </a:pPr>
-            <a:r>
-              <a:rPr lang="en-US" sz="1200" dirty="0">
-                <a:solidFill>
-                  <a:srgbClr val="1A1A1A"/>
-                </a:solidFill>
-                <a:latin typeface="Georgia" pitchFamily="34" charset="0"/>
-                <a:ea typeface="Georgia" pitchFamily="34" charset="-122"/>
-                <a:cs typeface="Georgia" pitchFamily="34" charset="-120"/>
-              </a:rPr>
-              <a:t>.</a:t>
+              <a:t> Comprehensive astronomical text.</a:t>
             </a:r>
             <a:endParaRPr lang="en-US" sz="1200" dirty="0"/>
           </a:p>
+        </p:txBody>
+      </p:sp>
+      <p:sp>
+        <p:nvSpPr>
+          <p:cNvPr id="5" name="Text 3"/>
+          <p:cNvSpPr/>
+          <p:nvPr/>
+        </p:nvSpPr>
+        <p:spPr>
+          <a:xfrm>
+            <a:off x="634901" y="1266974"/>
+            <a:ext cx="8102798" cy="525661"/>
+          </a:xfrm>
+          <a:prstGeom prst="rect">
+            <a:avLst/>
+          </a:prstGeom>
+          <a:noFill/>
+          <a:ln/>
+        </p:spPr>
+        <p:txBody>
+          <a:bodyPr wrap="square" lIns="0" tIns="0" rIns="0" bIns="0" rtlCol="0" anchor="t"/>
+          <a:lstStyle/>
           <a:p>
             <a:pPr algn="l" marL="342900" indent="-342900">
               <a:lnSpc>
@@ -3292,24 +5036,28 @@
               <a:buChar char="•"/>
             </a:pPr>
             <a:r>
-              <a:rPr lang="en-US" sz="1200" b="1" dirty="0">
-                <a:solidFill>
-                  <a:srgbClr val="1A1A1A"/>
-                </a:solidFill>
-                <a:latin typeface="Georgia" pitchFamily="34" charset="0"/>
-                <a:ea typeface="Georgia" pitchFamily="34" charset="-122"/>
-                <a:cs typeface="Georgia" pitchFamily="34" charset="-120"/>
-              </a:rPr>
-              <a:t>Tier down:</a:t>
-            </a:r>
-            <a:pPr algn="l" indent="0" marL="0">
+              <a:rPr lang="en-US" sz="1200" dirty="0">
+                <a:solidFill>
+                  <a:srgbClr val="1A1A1A"/>
+                </a:solidFill>
+                <a:latin typeface="Georgia" pitchFamily="34" charset="0"/>
+                <a:ea typeface="Georgia" pitchFamily="34" charset="-122"/>
+                <a:cs typeface="Georgia" pitchFamily="34" charset="-120"/>
+              </a:rPr>
+              <a:t>Earth's circumference computed within ~1% of modern value.</a:t>
+            </a:r>
+            <a:endParaRPr lang="en-US" sz="1200" dirty="0"/>
+          </a:p>
+          <a:p>
+            <a:pPr algn="l" marL="342900" indent="-342900">
               <a:lnSpc>
                 <a:spcPts val="1620"/>
               </a:lnSpc>
               <a:spcAft>
                 <a:spcPts val="300"/>
               </a:spcAft>
-              <a:buNone/>
+              <a:buSzPct val="100000"/>
+              <a:buChar char="•"/>
             </a:pPr>
             <a:r>
               <a:rPr lang="en-US" sz="1200" dirty="0">
@@ -3320,7 +5068,7 @@
                 <a:ea typeface="Georgia" pitchFamily="34" charset="-122"/>
                 <a:cs typeface="Georgia" pitchFamily="34" charset="-120"/>
               </a:rPr>
-              <a:t> Focus on the three achievements; the Yavana question is the depth layer.</a:t>
+              <a:t>Detailed eclipse predictions.</a:t>
             </a:r>
             <a:endParaRPr lang="en-US" sz="1200" dirty="0"/>
           </a:p>
@@ -3328,7 +5076,7 @@
       </p:sp>
       <p:sp>
         <p:nvSpPr>
-          <p:cNvPr id="5" name="Text 3"/>
+          <p:cNvPr id="6" name="Text 4"/>
           <p:cNvSpPr/>
           <p:nvPr/>
         </p:nvSpPr>
@@ -3478,7 +5226,7 @@
                 <a:ea typeface="Times New Roman" pitchFamily="34" charset="-122"/>
                 <a:cs typeface="Times New Roman" pitchFamily="34" charset="-120"/>
               </a:rPr>
-              <a:t>Teacher notes</a:t>
+              <a:t>Core (25 min) (cont.)</a:t>
             </a:r>
             <a:endParaRPr lang="en-US" sz="1800" dirty="0"/>
           </a:p>
@@ -3492,8 +5240,8 @@
         </p:nvSpPr>
         <p:spPr>
           <a:xfrm>
-            <a:off x="406301" y="870942"/>
-            <a:ext cx="8498026" cy="426541"/>
+            <a:off x="634901" y="883593"/>
+            <a:ext cx="8102798" cy="281880"/>
           </a:xfrm>
           <a:prstGeom prst="rect">
             <a:avLst/>
@@ -3505,13 +5253,31 @@
           <a:bodyPr wrap="square" lIns="0" tIns="0" rIns="0" bIns="0" rtlCol="0" anchor="t"/>
           <a:lstStyle/>
           <a:p>
+            <a:pPr algn="l" marL="342900" indent="-342900">
+              <a:lnSpc>
+                <a:spcPts val="1620"/>
+              </a:lnSpc>
+              <a:spcAft>
+                <a:spcPts val="300"/>
+              </a:spcAft>
+              <a:buSzPct val="100000"/>
+              <a:buChar char="•"/>
+            </a:pPr>
+            <a:r>
+              <a:rPr lang="en-US" sz="1200" b="1" dirty="0">
+                <a:solidFill>
+                  <a:srgbClr val="1A1A1A"/>
+                </a:solidFill>
+                <a:latin typeface="Georgia" pitchFamily="34" charset="0"/>
+                <a:ea typeface="Georgia" pitchFamily="34" charset="-122"/>
+                <a:cs typeface="Georgia" pitchFamily="34" charset="-120"/>
+              </a:rPr>
+              <a:t>Varāhamihira (~6th c. CE).</a:t>
+            </a:r>
             <a:pPr algn="l" indent="0" marL="0">
               <a:lnSpc>
-                <a:spcPts val="1680"/>
-              </a:lnSpc>
-              <a:spcBef>
-                <a:spcPts val="300"/>
-              </a:spcBef>
+                <a:spcPts val="1620"/>
+              </a:lnSpc>
               <a:spcAft>
                 <a:spcPts val="300"/>
               </a:spcAft>
@@ -3526,7 +5292,27 @@
                 <a:ea typeface="Georgia" pitchFamily="34" charset="-122"/>
                 <a:cs typeface="Georgia" pitchFamily="34" charset="-120"/>
               </a:rPr>
-              <a:t>– The Yavana evidence is well-documented. Don't shy from it. Honest history shows the Indian tradition as participant in a wider scholarly world.</a:t>
+              <a:t> </a:t>
+            </a:r>
+            <a:pPr algn="l" indent="0" marL="0">
+              <a:lnSpc>
+                <a:spcPts val="1620"/>
+              </a:lnSpc>
+              <a:spcAft>
+                <a:spcPts val="300"/>
+              </a:spcAft>
+              <a:buNone/>
+            </a:pPr>
+            <a:r>
+              <a:rPr lang="en-US" sz="1200" i="1" dirty="0">
+                <a:solidFill>
+                  <a:srgbClr val="1A1A1A"/>
+                </a:solidFill>
+                <a:latin typeface="Georgia" pitchFamily="34" charset="0"/>
+                <a:ea typeface="Georgia" pitchFamily="34" charset="-122"/>
+                <a:cs typeface="Georgia" pitchFamily="34" charset="-120"/>
+              </a:rPr>
+              <a:t>Pañca-siddhāntikā.</a:t>
             </a:r>
             <a:endParaRPr lang="en-US" sz="1200" dirty="0"/>
           </a:p>
@@ -3535,6 +5321,116 @@
       <p:sp>
         <p:nvSpPr>
           <p:cNvPr id="5" name="Text 3"/>
+          <p:cNvSpPr/>
+          <p:nvPr/>
+        </p:nvSpPr>
+        <p:spPr>
+          <a:xfrm>
+            <a:off x="634901" y="1266974"/>
+            <a:ext cx="8102798" cy="937022"/>
+          </a:xfrm>
+          <a:prstGeom prst="rect">
+            <a:avLst/>
+          </a:prstGeom>
+          <a:noFill/>
+          <a:ln/>
+        </p:spPr>
+        <p:txBody>
+          <a:bodyPr wrap="square" lIns="0" tIns="0" rIns="0" bIns="0" rtlCol="0" anchor="t"/>
+          <a:lstStyle/>
+          <a:p>
+            <a:pPr algn="l" marL="342900" indent="-342900">
+              <a:lnSpc>
+                <a:spcPts val="1620"/>
+              </a:lnSpc>
+              <a:spcAft>
+                <a:spcPts val="300"/>
+              </a:spcAft>
+              <a:buSzPct val="100000"/>
+              <a:buChar char="•"/>
+            </a:pPr>
+            <a:r>
+              <a:rPr lang="en-US" sz="1200" b="1" dirty="0">
+                <a:solidFill>
+                  <a:srgbClr val="1A1A1A"/>
+                </a:solidFill>
+                <a:latin typeface="Georgia" pitchFamily="34" charset="0"/>
+                <a:ea typeface="Georgia" pitchFamily="34" charset="-122"/>
+                <a:cs typeface="Georgia" pitchFamily="34" charset="-120"/>
+              </a:rPr>
+              <a:t>Compares 5 different astronomical systems</a:t>
+            </a:r>
+            <a:pPr algn="l" indent="0" marL="0">
+              <a:lnSpc>
+                <a:spcPts val="1620"/>
+              </a:lnSpc>
+              <a:spcAft>
+                <a:spcPts val="300"/>
+              </a:spcAft>
+              <a:buNone/>
+            </a:pPr>
+            <a:r>
+              <a:rPr lang="en-US" sz="1200" dirty="0">
+                <a:solidFill>
+                  <a:srgbClr val="1A1A1A"/>
+                </a:solidFill>
+                <a:latin typeface="Georgia" pitchFamily="34" charset="0"/>
+                <a:ea typeface="Georgia" pitchFamily="34" charset="-122"/>
+                <a:cs typeface="Georgia" pitchFamily="34" charset="-120"/>
+              </a:rPr>
+              <a:t> — including a "Romaka" (Greek-derived) system and a "Pauliśa" system possibly derived from Greek astronomer Paul of Alexandria.</a:t>
+            </a:r>
+            <a:endParaRPr lang="en-US" sz="1200" dirty="0"/>
+          </a:p>
+          <a:p>
+            <a:pPr algn="l" marL="342900" indent="-342900">
+              <a:lnSpc>
+                <a:spcPts val="1620"/>
+              </a:lnSpc>
+              <a:spcAft>
+                <a:spcPts val="300"/>
+              </a:spcAft>
+              <a:buSzPct val="100000"/>
+              <a:buChar char="•"/>
+            </a:pPr>
+            <a:r>
+              <a:rPr lang="en-US" sz="1200" b="1" dirty="0">
+                <a:solidFill>
+                  <a:srgbClr val="1A1A1A"/>
+                </a:solidFill>
+                <a:latin typeface="Georgia" pitchFamily="34" charset="0"/>
+                <a:ea typeface="Georgia" pitchFamily="34" charset="-122"/>
+                <a:cs typeface="Georgia" pitchFamily="34" charset="-120"/>
+              </a:rPr>
+              <a:t>This is huge.</a:t>
+            </a:r>
+            <a:pPr algn="l" indent="0" marL="0">
+              <a:lnSpc>
+                <a:spcPts val="1620"/>
+              </a:lnSpc>
+              <a:spcAft>
+                <a:spcPts val="300"/>
+              </a:spcAft>
+              <a:buNone/>
+            </a:pPr>
+            <a:r>
+              <a:rPr lang="en-US" sz="1200" dirty="0">
+                <a:solidFill>
+                  <a:srgbClr val="1A1A1A"/>
+                </a:solidFill>
+                <a:latin typeface="Georgia" pitchFamily="34" charset="0"/>
+                <a:ea typeface="Georgia" pitchFamily="34" charset="-122"/>
+                <a:cs typeface="Georgia" pitchFamily="34" charset="-120"/>
+              </a:rPr>
+              <a:t> It documents that 6th-c. Indian astronomers were actively reading and engaging Greek astronomical work.</a:t>
+            </a:r>
+            <a:endParaRPr lang="en-US" sz="1200" dirty="0"/>
+          </a:p>
+        </p:txBody>
+      </p:sp>
+      <p:sp>
+        <p:nvSpPr>
+          <p:cNvPr id="6" name="Text 4"/>
           <p:cNvSpPr/>
           <p:nvPr/>
         </p:nvSpPr>
@@ -3684,7 +5580,7 @@
                 <a:ea typeface="Times New Roman" pitchFamily="34" charset="-122"/>
                 <a:cs typeface="Times New Roman" pitchFamily="34" charset="-120"/>
               </a:rPr>
-              <a:t>Citation(s) used</a:t>
+              <a:t>Core (25 min) (cont.)</a:t>
             </a:r>
             <a:endParaRPr lang="en-US" sz="1800" dirty="0"/>
           </a:p>
@@ -3698,8 +5594,8 @@
         </p:nvSpPr>
         <p:spPr>
           <a:xfrm>
-            <a:off x="406301" y="870942"/>
-            <a:ext cx="8498026" cy="426541"/>
+            <a:off x="634901" y="883593"/>
+            <a:ext cx="8102798" cy="281880"/>
           </a:xfrm>
           <a:prstGeom prst="rect">
             <a:avLst/>
@@ -3711,13 +5607,77 @@
           <a:bodyPr wrap="square" lIns="0" tIns="0" rIns="0" bIns="0" rtlCol="0" anchor="t"/>
           <a:lstStyle/>
           <a:p>
+            <a:pPr algn="l" marL="342900" indent="-342900">
+              <a:lnSpc>
+                <a:spcPts val="1620"/>
+              </a:lnSpc>
+              <a:spcAft>
+                <a:spcPts val="300"/>
+              </a:spcAft>
+              <a:buSzPct val="100000"/>
+              <a:buChar char="•"/>
+            </a:pPr>
+            <a:r>
+              <a:rPr lang="en-US" sz="1200" b="1" dirty="0">
+                <a:solidFill>
+                  <a:srgbClr val="1A1A1A"/>
+                </a:solidFill>
+                <a:latin typeface="Georgia" pitchFamily="34" charset="0"/>
+                <a:ea typeface="Georgia" pitchFamily="34" charset="-122"/>
+                <a:cs typeface="Georgia" pitchFamily="34" charset="-120"/>
+              </a:rPr>
+              <a:t>The Yavana question.</a:t>
+            </a:r>
+            <a:endParaRPr lang="en-US" sz="1200" dirty="0"/>
+          </a:p>
+        </p:txBody>
+      </p:sp>
+      <p:sp>
+        <p:nvSpPr>
+          <p:cNvPr id="5" name="Text 3"/>
+          <p:cNvSpPr/>
+          <p:nvPr/>
+        </p:nvSpPr>
+        <p:spPr>
+          <a:xfrm>
+            <a:off x="634901" y="1266974"/>
+            <a:ext cx="8102798" cy="1630263"/>
+          </a:xfrm>
+          <a:prstGeom prst="rect">
+            <a:avLst/>
+          </a:prstGeom>
+          <a:noFill/>
+          <a:ln/>
+        </p:spPr>
+        <p:txBody>
+          <a:bodyPr wrap="square" lIns="0" tIns="0" rIns="0" bIns="0" rtlCol="0" anchor="t"/>
+          <a:lstStyle/>
+          <a:p>
+            <a:pPr algn="l" marL="342900" indent="-342900">
+              <a:lnSpc>
+                <a:spcPts val="1620"/>
+              </a:lnSpc>
+              <a:spcAft>
+                <a:spcPts val="300"/>
+              </a:spcAft>
+              <a:buSzPct val="100000"/>
+              <a:buChar char="•"/>
+            </a:pPr>
+            <a:r>
+              <a:rPr lang="en-US" sz="1200" i="1" dirty="0">
+                <a:solidFill>
+                  <a:srgbClr val="1A1A1A"/>
+                </a:solidFill>
+                <a:latin typeface="Georgia" pitchFamily="34" charset="0"/>
+                <a:ea typeface="Georgia" pitchFamily="34" charset="-122"/>
+                <a:cs typeface="Georgia" pitchFamily="34" charset="-120"/>
+              </a:rPr>
+              <a:t>Yavana</a:t>
+            </a:r>
             <a:pPr algn="l" indent="0" marL="0">
               <a:lnSpc>
-                <a:spcPts val="1680"/>
-              </a:lnSpc>
-              <a:spcBef>
-                <a:spcPts val="300"/>
-              </a:spcBef>
+                <a:spcPts val="1620"/>
+              </a:lnSpc>
               <a:spcAft>
                 <a:spcPts val="300"/>
               </a:spcAft>
@@ -3732,15 +5692,84 @@
                 <a:ea typeface="Georgia" pitchFamily="34" charset="-122"/>
                 <a:cs typeface="Georgia" pitchFamily="34" charset="-120"/>
               </a:rPr>
-              <a:t>– Aryabhata, </a:t>
+              <a:t> = "Greek" in Sanskrit. The Indo-Greek kingdoms (2nd c. BCE – 1st c. CE) created sustained cultural-intellectual exchange.</a:t>
+            </a:r>
+            <a:endParaRPr lang="en-US" sz="1200" dirty="0"/>
+          </a:p>
+          <a:p>
+            <a:pPr algn="l" marL="342900" indent="-342900">
+              <a:lnSpc>
+                <a:spcPts val="1620"/>
+              </a:lnSpc>
+              <a:spcAft>
+                <a:spcPts val="300"/>
+              </a:spcAft>
+              <a:buSzPct val="100000"/>
+              <a:buChar char="•"/>
+            </a:pPr>
+            <a:r>
+              <a:rPr lang="en-US" sz="1200" dirty="0">
+                <a:solidFill>
+                  <a:srgbClr val="1A1A1A"/>
+                </a:solidFill>
+                <a:latin typeface="Georgia" pitchFamily="34" charset="0"/>
+                <a:ea typeface="Georgia" pitchFamily="34" charset="-122"/>
+                <a:cs typeface="Georgia" pitchFamily="34" charset="-120"/>
+              </a:rPr>
+              <a:t>Greek astronomical methods influenced Indian astronomy.</a:t>
+            </a:r>
+            <a:endParaRPr lang="en-US" sz="1200" dirty="0"/>
+          </a:p>
+          <a:p>
+            <a:pPr algn="l" marL="342900" indent="-342900">
+              <a:lnSpc>
+                <a:spcPts val="1620"/>
+              </a:lnSpc>
+              <a:spcAft>
+                <a:spcPts val="300"/>
+              </a:spcAft>
+              <a:buSzPct val="100000"/>
+              <a:buChar char="•"/>
+            </a:pPr>
+            <a:r>
+              <a:rPr lang="en-US" sz="1200" dirty="0">
+                <a:solidFill>
+                  <a:srgbClr val="1A1A1A"/>
+                </a:solidFill>
+                <a:latin typeface="Georgia" pitchFamily="34" charset="0"/>
+                <a:ea typeface="Georgia" pitchFamily="34" charset="-122"/>
+                <a:cs typeface="Georgia" pitchFamily="34" charset="-120"/>
+              </a:rPr>
+              <a:t>Indian astronomical methods (Hindu numerals, trigonometric tables) influenced Arab and via Arab, European astronomy.</a:t>
+            </a:r>
+            <a:endParaRPr lang="en-US" sz="1200" dirty="0"/>
+          </a:p>
+          <a:p>
+            <a:pPr algn="l" marL="342900" indent="-342900">
+              <a:lnSpc>
+                <a:spcPts val="1620"/>
+              </a:lnSpc>
+              <a:spcAft>
+                <a:spcPts val="300"/>
+              </a:spcAft>
+              <a:buSzPct val="100000"/>
+              <a:buChar char="•"/>
+            </a:pPr>
+            <a:r>
+              <a:rPr lang="en-US" sz="1200" dirty="0">
+                <a:solidFill>
+                  <a:srgbClr val="1A1A1A"/>
+                </a:solidFill>
+                <a:latin typeface="Georgia" pitchFamily="34" charset="0"/>
+                <a:ea typeface="Georgia" pitchFamily="34" charset="-122"/>
+                <a:cs typeface="Georgia" pitchFamily="34" charset="-120"/>
+              </a:rPr>
+              <a:t>The "pure Indian" framing of IKS doesn't survive contact with this evidence. The honest framing: Indian intellectual tradition is </a:t>
             </a:r>
             <a:pPr algn="l" indent="0" marL="0">
               <a:lnSpc>
-                <a:spcPts val="1680"/>
-              </a:lnSpc>
-              <a:spcBef>
-                <a:spcPts val="300"/>
-              </a:spcBef>
+                <a:spcPts val="1620"/>
+              </a:lnSpc>
               <a:spcAft>
                 <a:spcPts val="300"/>
               </a:spcAft>
@@ -3755,15 +5784,12 @@
                 <a:ea typeface="Georgia" pitchFamily="34" charset="-122"/>
                 <a:cs typeface="Georgia" pitchFamily="34" charset="-120"/>
               </a:rPr>
-              <a:t>Aryabhaṭīya</a:t>
+              <a:t>partly indigenous, partly cosmopolitan</a:t>
             </a:r>
             <a:pPr algn="l" indent="0" marL="0">
               <a:lnSpc>
-                <a:spcPts val="1680"/>
-              </a:lnSpc>
-              <a:spcBef>
-                <a:spcPts val="300"/>
-              </a:spcBef>
+                <a:spcPts val="1620"/>
+              </a:lnSpc>
               <a:spcAft>
                 <a:spcPts val="300"/>
               </a:spcAft>
@@ -3778,53 +5804,7 @@
                 <a:ea typeface="Georgia" pitchFamily="34" charset="-122"/>
                 <a:cs typeface="Georgia" pitchFamily="34" charset="-120"/>
               </a:rPr>
-              <a:t> (499 CE) — Clark (1930). – Varāhamihira, </a:t>
-            </a:r>
-            <a:pPr algn="l" indent="0" marL="0">
-              <a:lnSpc>
-                <a:spcPts val="1680"/>
-              </a:lnSpc>
-              <a:spcBef>
-                <a:spcPts val="300"/>
-              </a:spcBef>
-              <a:spcAft>
-                <a:spcPts val="300"/>
-              </a:spcAft>
-              <a:buNone/>
-            </a:pPr>
-            <a:r>
-              <a:rPr lang="en-US" sz="1200" i="1" dirty="0">
-                <a:solidFill>
-                  <a:srgbClr val="1A1A1A"/>
-                </a:solidFill>
-                <a:latin typeface="Georgia" pitchFamily="34" charset="0"/>
-                <a:ea typeface="Georgia" pitchFamily="34" charset="-122"/>
-                <a:cs typeface="Georgia" pitchFamily="34" charset="-120"/>
-              </a:rPr>
-              <a:t>Pañca-siddhāntikā</a:t>
-            </a:r>
-            <a:pPr algn="l" indent="0" marL="0">
-              <a:lnSpc>
-                <a:spcPts val="1680"/>
-              </a:lnSpc>
-              <a:spcBef>
-                <a:spcPts val="300"/>
-              </a:spcBef>
-              <a:spcAft>
-                <a:spcPts val="300"/>
-              </a:spcAft>
-              <a:buNone/>
-            </a:pPr>
-            <a:r>
-              <a:rPr lang="en-US" sz="1200" dirty="0">
-                <a:solidFill>
-                  <a:srgbClr val="1A1A1A"/>
-                </a:solidFill>
-                <a:latin typeface="Georgia" pitchFamily="34" charset="0"/>
-                <a:ea typeface="Georgia" pitchFamily="34" charset="-122"/>
-                <a:cs typeface="Georgia" pitchFamily="34" charset="-120"/>
-              </a:rPr>
-              <a:t> — Neugebauer &amp; Pingree (1971). – Pingree (1996).</a:t>
+              <a:t>, in dynamic exchange.</a:t>
             </a:r>
             <a:endParaRPr lang="en-US" sz="1200" dirty="0"/>
           </a:p>
@@ -3832,7 +5812,7 @@
       </p:sp>
       <p:sp>
         <p:nvSpPr>
-          <p:cNvPr id="5" name="Text 3"/>
+          <p:cNvPr id="6" name="Text 4"/>
           <p:cNvSpPr/>
           <p:nvPr/>
         </p:nvSpPr>
